--- a/docs/presentations/Session2.pptx
+++ b/docs/presentations/Session2.pptx
@@ -4117,7 +4117,7 @@
         <p:spPr>
           <a:xfrm>
             <a:off x="0" y="1980000"/>
-            <a:ext cx="9719280" cy="989280"/>
+            <a:ext cx="9718920" cy="988920"/>
           </a:xfrm>
           <a:prstGeom prst="rect">
             <a:avLst/>
@@ -4148,8 +4148,8 @@
         </p:nvSpPr>
         <p:spPr>
           <a:xfrm>
-            <a:off x="360000" y="270000"/>
-            <a:ext cx="9359280" cy="719280"/>
+            <a:off x="504000" y="226080"/>
+            <a:ext cx="9072000" cy="946440"/>
           </a:xfrm>
           <a:prstGeom prst="rect">
             <a:avLst/>
@@ -4160,19 +4160,14 @@
             <a:noAutofit/>
           </a:bodyPr>
           <a:p>
-            <a:r>
-              <a:rPr b="0" lang="en-US" sz="1800" spc="-1" strike="noStrike">
+            <a:pPr algn="ctr"/>
+            <a:r>
+              <a:rPr b="0" lang="en-US" sz="4400" spc="-1" strike="noStrike">
                 <a:latin typeface="Arial"/>
               </a:rPr>
-              <a:t>Click to edit the title </a:t>
-            </a:r>
-            <a:r>
-              <a:rPr b="0" lang="en-US" sz="1800" spc="-1" strike="noStrike">
-                <a:latin typeface="Arial"/>
-              </a:rPr>
-              <a:t>text format</a:t>
-            </a:r>
-            <a:endParaRPr b="0" lang="en-US" sz="1800" spc="-1" strike="noStrike">
+              <a:t>Click to edit the title text format</a:t>
+            </a:r>
+            <a:endParaRPr b="0" lang="en-US" sz="4400" spc="-1" strike="noStrike">
               <a:latin typeface="Arial"/>
             </a:endParaRPr>
           </a:p>
@@ -4190,8 +4185,8 @@
         </p:nvSpPr>
         <p:spPr>
           <a:xfrm>
-            <a:off x="360000" y="1350000"/>
-            <a:ext cx="9179280" cy="3509280"/>
+            <a:off x="504000" y="1326600"/>
+            <a:ext cx="9072000" cy="3288600"/>
           </a:xfrm>
           <a:prstGeom prst="rect">
             <a:avLst/>
@@ -4214,12 +4209,12 @@
               <a:buChar char=""/>
             </a:pPr>
             <a:r>
-              <a:rPr b="0" lang="en-US" sz="1800" spc="-1" strike="noStrike">
+              <a:rPr b="0" lang="en-US" sz="3200" spc="-1" strike="noStrike">
                 <a:latin typeface="Arial"/>
               </a:rPr>
               <a:t>Click to edit the outline text format</a:t>
             </a:r>
-            <a:endParaRPr b="0" lang="en-US" sz="1800" spc="-1" strike="noStrike">
+            <a:endParaRPr b="0" lang="en-US" sz="3200" spc="-1" strike="noStrike">
               <a:latin typeface="Arial"/>
             </a:endParaRPr>
           </a:p>
@@ -4236,12 +4231,12 @@
               <a:buChar char=""/>
             </a:pPr>
             <a:r>
-              <a:rPr b="0" lang="en-US" sz="1800" spc="-1" strike="noStrike">
+              <a:rPr b="0" lang="en-US" sz="2800" spc="-1" strike="noStrike">
                 <a:latin typeface="Arial"/>
               </a:rPr>
               <a:t>Second Outline Level</a:t>
             </a:r>
-            <a:endParaRPr b="0" lang="en-US" sz="1800" spc="-1" strike="noStrike">
+            <a:endParaRPr b="0" lang="en-US" sz="2800" spc="-1" strike="noStrike">
               <a:latin typeface="Arial"/>
             </a:endParaRPr>
           </a:p>
@@ -4258,12 +4253,12 @@
               <a:buChar char=""/>
             </a:pPr>
             <a:r>
-              <a:rPr b="0" lang="en-US" sz="1800" spc="-1" strike="noStrike">
+              <a:rPr b="0" lang="en-US" sz="2400" spc="-1" strike="noStrike">
                 <a:latin typeface="Arial"/>
               </a:rPr>
               <a:t>Third Outline Level</a:t>
             </a:r>
-            <a:endParaRPr b="0" lang="en-US" sz="1800" spc="-1" strike="noStrike">
+            <a:endParaRPr b="0" lang="en-US" sz="2400" spc="-1" strike="noStrike">
               <a:latin typeface="Arial"/>
             </a:endParaRPr>
           </a:p>
@@ -4280,12 +4275,12 @@
               <a:buChar char=""/>
             </a:pPr>
             <a:r>
-              <a:rPr b="0" lang="en-US" sz="1800" spc="-1" strike="noStrike">
+              <a:rPr b="0" lang="en-US" sz="2000" spc="-1" strike="noStrike">
                 <a:latin typeface="Arial"/>
               </a:rPr>
               <a:t>Fourth Outline Level</a:t>
             </a:r>
-            <a:endParaRPr b="0" lang="en-US" sz="1800" spc="-1" strike="noStrike">
+            <a:endParaRPr b="0" lang="en-US" sz="2000" spc="-1" strike="noStrike">
               <a:latin typeface="Arial"/>
             </a:endParaRPr>
           </a:p>
@@ -4302,12 +4297,12 @@
               <a:buChar char=""/>
             </a:pPr>
             <a:r>
-              <a:rPr b="0" lang="en-US" sz="1800" spc="-1" strike="noStrike">
+              <a:rPr b="0" lang="en-US" sz="2000" spc="-1" strike="noStrike">
                 <a:latin typeface="Arial"/>
               </a:rPr>
               <a:t>Fifth Outline Level</a:t>
             </a:r>
-            <a:endParaRPr b="0" lang="en-US" sz="1800" spc="-1" strike="noStrike">
+            <a:endParaRPr b="0" lang="en-US" sz="2000" spc="-1" strike="noStrike">
               <a:latin typeface="Arial"/>
             </a:endParaRPr>
           </a:p>
@@ -4324,12 +4319,12 @@
               <a:buChar char=""/>
             </a:pPr>
             <a:r>
-              <a:rPr b="0" lang="en-US" sz="1800" spc="-1" strike="noStrike">
+              <a:rPr b="0" lang="en-US" sz="2000" spc="-1" strike="noStrike">
                 <a:latin typeface="Arial"/>
               </a:rPr>
               <a:t>Sixth Outline Level</a:t>
             </a:r>
-            <a:endParaRPr b="0" lang="en-US" sz="1800" spc="-1" strike="noStrike">
+            <a:endParaRPr b="0" lang="en-US" sz="2000" spc="-1" strike="noStrike">
               <a:latin typeface="Arial"/>
             </a:endParaRPr>
           </a:p>
@@ -4346,12 +4341,12 @@
               <a:buChar char=""/>
             </a:pPr>
             <a:r>
-              <a:rPr b="0" lang="en-US" sz="1800" spc="-1" strike="noStrike">
+              <a:rPr b="0" lang="en-US" sz="2000" spc="-1" strike="noStrike">
                 <a:latin typeface="Arial"/>
               </a:rPr>
               <a:t>Seventh Outline Level</a:t>
             </a:r>
-            <a:endParaRPr b="0" lang="en-US" sz="1800" spc="-1" strike="noStrike">
+            <a:endParaRPr b="0" lang="en-US" sz="2000" spc="-1" strike="noStrike">
               <a:latin typeface="Arial"/>
             </a:endParaRPr>
           </a:p>
@@ -4403,7 +4398,7 @@
         <p:spPr>
           <a:xfrm>
             <a:off x="0" y="180000"/>
-            <a:ext cx="9719280" cy="899280"/>
+            <a:ext cx="9718920" cy="898920"/>
           </a:xfrm>
           <a:prstGeom prst="rect">
             <a:avLst/>
@@ -4431,7 +4426,7 @@
         <p:spPr>
           <a:xfrm>
             <a:off x="7560000" y="5130000"/>
-            <a:ext cx="2519280" cy="404280"/>
+            <a:ext cx="2518920" cy="403920"/>
           </a:xfrm>
           <a:prstGeom prst="rect">
             <a:avLst/>
@@ -4459,7 +4454,7 @@
         <p:spPr>
           <a:xfrm>
             <a:off x="900000" y="5130000"/>
-            <a:ext cx="6479280" cy="404280"/>
+            <a:ext cx="6478920" cy="403920"/>
           </a:xfrm>
           <a:prstGeom prst="rect">
             <a:avLst/>
@@ -4489,7 +4484,7 @@
         <p:spPr>
           <a:xfrm>
             <a:off x="180000" y="5130000"/>
-            <a:ext cx="539280" cy="404280"/>
+            <a:ext cx="538920" cy="403920"/>
           </a:xfrm>
           <a:prstGeom prst="rect">
             <a:avLst/>
@@ -4515,7 +4510,7 @@
         <p:spPr>
           <a:xfrm>
             <a:off x="180000" y="5130000"/>
-            <a:ext cx="539280" cy="404280"/>
+            <a:ext cx="538920" cy="403920"/>
           </a:xfrm>
           <a:prstGeom prst="rect">
             <a:avLst/>
@@ -4563,25 +4558,7 @@
               <a:rPr b="0" lang="en-US" sz="4400" spc="-1" strike="noStrike">
                 <a:latin typeface="Arial"/>
               </a:rPr>
-              <a:t>Click to </a:t>
-            </a:r>
-            <a:r>
-              <a:rPr b="0" lang="en-US" sz="4400" spc="-1" strike="noStrike">
-                <a:latin typeface="Arial"/>
-              </a:rPr>
-              <a:t>edit the </a:t>
-            </a:r>
-            <a:r>
-              <a:rPr b="0" lang="en-US" sz="4400" spc="-1" strike="noStrike">
-                <a:latin typeface="Arial"/>
-              </a:rPr>
-              <a:t>title text </a:t>
-            </a:r>
-            <a:r>
-              <a:rPr b="0" lang="en-US" sz="4400" spc="-1" strike="noStrike">
-                <a:latin typeface="Arial"/>
-              </a:rPr>
-              <a:t>format</a:t>
+              <a:t>Click to edit the title text format</a:t>
             </a:r>
             <a:endParaRPr b="0" lang="en-US" sz="4400" spc="-1" strike="noStrike">
               <a:latin typeface="Arial"/>
@@ -4814,7 +4791,7 @@
         <p:spPr>
           <a:xfrm>
             <a:off x="0" y="180000"/>
-            <a:ext cx="9719280" cy="899280"/>
+            <a:ext cx="9718920" cy="898920"/>
           </a:xfrm>
           <a:prstGeom prst="rect">
             <a:avLst/>
@@ -4842,7 +4819,7 @@
         <p:spPr>
           <a:xfrm>
             <a:off x="7560000" y="5130000"/>
-            <a:ext cx="2519280" cy="404280"/>
+            <a:ext cx="2518920" cy="403920"/>
           </a:xfrm>
           <a:prstGeom prst="rect">
             <a:avLst/>
@@ -4870,7 +4847,7 @@
         <p:spPr>
           <a:xfrm>
             <a:off x="900000" y="5130000"/>
-            <a:ext cx="6479280" cy="404280"/>
+            <a:ext cx="6478920" cy="403920"/>
           </a:xfrm>
           <a:prstGeom prst="rect">
             <a:avLst/>
@@ -4900,7 +4877,7 @@
         <p:spPr>
           <a:xfrm>
             <a:off x="180000" y="5130000"/>
-            <a:ext cx="539280" cy="404280"/>
+            <a:ext cx="538920" cy="403920"/>
           </a:xfrm>
           <a:prstGeom prst="rect">
             <a:avLst/>
@@ -4926,7 +4903,7 @@
         <p:spPr>
           <a:xfrm>
             <a:off x="180000" y="5130000"/>
-            <a:ext cx="539280" cy="404280"/>
+            <a:ext cx="538920" cy="403920"/>
           </a:xfrm>
           <a:prstGeom prst="rect">
             <a:avLst/>
@@ -4974,25 +4951,7 @@
               <a:rPr b="0" lang="en-US" sz="4400" spc="-1" strike="noStrike">
                 <a:latin typeface="Arial"/>
               </a:rPr>
-              <a:t>Click to </a:t>
-            </a:r>
-            <a:r>
-              <a:rPr b="0" lang="en-US" sz="4400" spc="-1" strike="noStrike">
-                <a:latin typeface="Arial"/>
-              </a:rPr>
-              <a:t>edit the </a:t>
-            </a:r>
-            <a:r>
-              <a:rPr b="0" lang="en-US" sz="4400" spc="-1" strike="noStrike">
-                <a:latin typeface="Arial"/>
-              </a:rPr>
-              <a:t>title text </a:t>
-            </a:r>
-            <a:r>
-              <a:rPr b="0" lang="en-US" sz="4400" spc="-1" strike="noStrike">
-                <a:latin typeface="Arial"/>
-              </a:rPr>
-              <a:t>format</a:t>
+              <a:t>Click to edit the title text format</a:t>
             </a:r>
             <a:endParaRPr b="0" lang="en-US" sz="4400" spc="-1" strike="noStrike">
               <a:latin typeface="Arial"/>
@@ -5225,7 +5184,7 @@
         <p:spPr>
           <a:xfrm>
             <a:off x="360000" y="2160000"/>
-            <a:ext cx="9179280" cy="719280"/>
+            <a:ext cx="9178920" cy="718920"/>
           </a:xfrm>
           <a:prstGeom prst="rect">
             <a:avLst/>
@@ -5287,7 +5246,7 @@
         <p:spPr>
           <a:xfrm>
             <a:off x="540000" y="3150000"/>
-            <a:ext cx="8999280" cy="1889280"/>
+            <a:ext cx="8998920" cy="1888920"/>
           </a:xfrm>
           <a:prstGeom prst="rect">
             <a:avLst/>
@@ -5343,7 +5302,7 @@
         <p:spPr>
           <a:xfrm>
             <a:off x="360000" y="270000"/>
-            <a:ext cx="9359280" cy="719280"/>
+            <a:ext cx="9358920" cy="718920"/>
           </a:xfrm>
           <a:prstGeom prst="rect">
             <a:avLst/>
@@ -5394,7 +5353,7 @@
         <p:spPr>
           <a:xfrm>
             <a:off x="360000" y="1350000"/>
-            <a:ext cx="9179280" cy="3509280"/>
+            <a:ext cx="9178920" cy="3508920"/>
           </a:xfrm>
           <a:prstGeom prst="rect">
             <a:avLst/>
@@ -5424,7 +5383,7 @@
         <p:spPr>
           <a:xfrm>
             <a:off x="228600" y="1350000"/>
-            <a:ext cx="4316400" cy="3386880"/>
+            <a:ext cx="4316040" cy="3386520"/>
           </a:xfrm>
           <a:prstGeom prst="rect">
             <a:avLst/>
@@ -5448,7 +5407,7 @@
         <p:spPr>
           <a:xfrm>
             <a:off x="4503960" y="1143000"/>
-            <a:ext cx="3953520" cy="3725640"/>
+            <a:ext cx="3953160" cy="3725280"/>
           </a:xfrm>
           <a:prstGeom prst="rect">
             <a:avLst/>
@@ -5526,7 +5485,7 @@
         <p:spPr>
           <a:xfrm>
             <a:off x="360000" y="270000"/>
-            <a:ext cx="9359280" cy="719280"/>
+            <a:ext cx="9358920" cy="718920"/>
           </a:xfrm>
           <a:prstGeom prst="rect">
             <a:avLst/>
@@ -5577,7 +5536,7 @@
         <p:spPr>
           <a:xfrm>
             <a:off x="360000" y="1350000"/>
-            <a:ext cx="9179280" cy="3509280"/>
+            <a:ext cx="9178920" cy="3508920"/>
           </a:xfrm>
           <a:prstGeom prst="rect">
             <a:avLst/>
@@ -5598,7 +5557,7 @@
             <a:normAutofit/>
           </a:bodyPr>
           <a:p>
-            <a:pPr marL="216000" indent="-215280">
+            <a:pPr marL="216000" indent="-214920">
               <a:lnSpc>
                 <a:spcPct val="100000"/>
               </a:lnSpc>
@@ -5626,7 +5585,7 @@
             </a:endParaRPr>
           </a:p>
           <a:p>
-            <a:pPr marL="216000" indent="-215280">
+            <a:pPr marL="216000" indent="-214920">
               <a:lnSpc>
                 <a:spcPct val="100000"/>
               </a:lnSpc>
@@ -5654,7 +5613,7 @@
             </a:endParaRPr>
           </a:p>
           <a:p>
-            <a:pPr lvl="1" marL="432000" indent="-215640">
+            <a:pPr lvl="1" marL="432000" indent="-215280">
               <a:lnSpc>
                 <a:spcPct val="100000"/>
               </a:lnSpc>
@@ -5683,7 +5642,7 @@
             </a:endParaRPr>
           </a:p>
           <a:p>
-            <a:pPr marL="216000" indent="-215280">
+            <a:pPr marL="216000" indent="-214920">
               <a:lnSpc>
                 <a:spcPct val="100000"/>
               </a:lnSpc>
@@ -5751,7 +5710,7 @@
         <p:spPr>
           <a:xfrm>
             <a:off x="360000" y="270000"/>
-            <a:ext cx="9359280" cy="719280"/>
+            <a:ext cx="9358920" cy="718920"/>
           </a:xfrm>
           <a:prstGeom prst="rect">
             <a:avLst/>
@@ -5802,7 +5761,7 @@
         <p:spPr>
           <a:xfrm>
             <a:off x="360000" y="1350000"/>
-            <a:ext cx="6920280" cy="3509280"/>
+            <a:ext cx="6919920" cy="3508920"/>
           </a:xfrm>
           <a:prstGeom prst="rect">
             <a:avLst/>
@@ -5870,7 +5829,7 @@
             </a:endParaRPr>
           </a:p>
           <a:p>
-            <a:pPr marL="216000" indent="-215280">
+            <a:pPr marL="216000" indent="-214920">
               <a:lnSpc>
                 <a:spcPct val="100000"/>
               </a:lnSpc>
@@ -5908,7 +5867,7 @@
             </a:endParaRPr>
           </a:p>
           <a:p>
-            <a:pPr marL="216000" indent="-215280">
+            <a:pPr marL="216000" indent="-214920">
               <a:lnSpc>
                 <a:spcPct val="100000"/>
               </a:lnSpc>
@@ -5936,7 +5895,7 @@
             </a:endParaRPr>
           </a:p>
           <a:p>
-            <a:pPr marL="216000" indent="-215280">
+            <a:pPr marL="216000" indent="-214920">
               <a:lnSpc>
                 <a:spcPct val="100000"/>
               </a:lnSpc>
@@ -5964,7 +5923,7 @@
             </a:endParaRPr>
           </a:p>
           <a:p>
-            <a:pPr lvl="1" marL="432000" indent="-215280">
+            <a:pPr lvl="1" marL="432000" indent="-214920">
               <a:lnSpc>
                 <a:spcPct val="100000"/>
               </a:lnSpc>
@@ -6002,7 +5961,7 @@
             </a:endParaRPr>
           </a:p>
           <a:p>
-            <a:pPr lvl="1" marL="432000" indent="-215280">
+            <a:pPr lvl="1" marL="432000" indent="-214920">
               <a:lnSpc>
                 <a:spcPct val="100000"/>
               </a:lnSpc>
@@ -6040,7 +5999,7 @@
             </a:endParaRPr>
           </a:p>
           <a:p>
-            <a:pPr lvl="1" marL="432000" indent="-215280">
+            <a:pPr lvl="1" marL="432000" indent="-214920">
               <a:lnSpc>
                 <a:spcPct val="100000"/>
               </a:lnSpc>
@@ -6078,7 +6037,7 @@
             </a:endParaRPr>
           </a:p>
           <a:p>
-            <a:pPr marL="216000" indent="-215280">
+            <a:pPr marL="216000" indent="-214920">
               <a:lnSpc>
                 <a:spcPct val="100000"/>
               </a:lnSpc>
@@ -6199,7 +6158,7 @@
         <p:spPr>
           <a:xfrm>
             <a:off x="7461720" y="2365200"/>
-            <a:ext cx="2500200" cy="3182040"/>
+            <a:ext cx="2499840" cy="3181680"/>
           </a:xfrm>
           <a:prstGeom prst="rect">
             <a:avLst/>
@@ -6218,7 +6177,7 @@
         <p:spPr>
           <a:xfrm>
             <a:off x="7772400" y="4343400"/>
-            <a:ext cx="457200" cy="457200"/>
+            <a:ext cx="456840" cy="456840"/>
           </a:xfrm>
           <a:prstGeom prst="ellipse">
             <a:avLst/>
@@ -6305,7 +6264,7 @@
         <p:spPr>
           <a:xfrm>
             <a:off x="360000" y="270000"/>
-            <a:ext cx="9359280" cy="719280"/>
+            <a:ext cx="9358920" cy="718920"/>
           </a:xfrm>
           <a:prstGeom prst="rect">
             <a:avLst/>
@@ -6356,7 +6315,7 @@
         <p:spPr>
           <a:xfrm>
             <a:off x="360000" y="1350000"/>
-            <a:ext cx="9179280" cy="3509280"/>
+            <a:ext cx="9178920" cy="3508920"/>
           </a:xfrm>
           <a:prstGeom prst="rect">
             <a:avLst/>
@@ -6412,7 +6371,7 @@
             </a:endParaRPr>
           </a:p>
           <a:p>
-            <a:pPr marL="216000" indent="-215280">
+            <a:pPr marL="216000" indent="-214920">
               <a:lnSpc>
                 <a:spcPct val="100000"/>
               </a:lnSpc>
@@ -6441,7 +6400,7 @@
             </a:endParaRPr>
           </a:p>
           <a:p>
-            <a:pPr lvl="1" marL="432000" indent="-215280">
+            <a:pPr lvl="1" marL="432000" indent="-214920">
               <a:lnSpc>
                 <a:spcPct val="100000"/>
               </a:lnSpc>
@@ -6470,7 +6429,7 @@
             </a:endParaRPr>
           </a:p>
           <a:p>
-            <a:pPr lvl="1" marL="432000" indent="-215280">
+            <a:pPr lvl="1" marL="432000" indent="-214920">
               <a:lnSpc>
                 <a:spcPct val="100000"/>
               </a:lnSpc>
@@ -6499,7 +6458,7 @@
             </a:endParaRPr>
           </a:p>
           <a:p>
-            <a:pPr lvl="1" marL="432000" indent="-215280">
+            <a:pPr lvl="1" marL="432000" indent="-214920">
               <a:lnSpc>
                 <a:spcPct val="100000"/>
               </a:lnSpc>
@@ -6561,7 +6520,7 @@
             </a:endParaRPr>
           </a:p>
           <a:p>
-            <a:pPr marL="216000" indent="-215280">
+            <a:pPr marL="216000" indent="-214920">
               <a:lnSpc>
                 <a:spcPct val="100000"/>
               </a:lnSpc>
@@ -6590,7 +6549,7 @@
             </a:endParaRPr>
           </a:p>
           <a:p>
-            <a:pPr lvl="1" marL="432000" indent="-215280">
+            <a:pPr lvl="1" marL="432000" indent="-214920">
               <a:lnSpc>
                 <a:spcPct val="100000"/>
               </a:lnSpc>
@@ -6671,7 +6630,7 @@
         <p:spPr>
           <a:xfrm>
             <a:off x="360000" y="270000"/>
-            <a:ext cx="9359280" cy="719280"/>
+            <a:ext cx="9358920" cy="718920"/>
           </a:xfrm>
           <a:prstGeom prst="rect">
             <a:avLst/>
@@ -6716,13 +6675,13 @@
       <p:sp>
         <p:nvSpPr>
           <p:cNvPr id="137" name=""/>
-          <p:cNvSpPr txBox="1"/>
+          <p:cNvSpPr/>
           <p:nvPr/>
         </p:nvSpPr>
         <p:spPr>
           <a:xfrm>
             <a:off x="157680" y="1141200"/>
-            <a:ext cx="9349200" cy="930240"/>
+            <a:ext cx="9348840" cy="929880"/>
           </a:xfrm>
           <a:prstGeom prst="rect">
             <a:avLst/>
@@ -6732,12 +6691,18 @@
             <a:noFill/>
           </a:ln>
         </p:spPr>
+        <p:style>
+          <a:lnRef idx="0"/>
+          <a:fillRef idx="0"/>
+          <a:effectRef idx="0"/>
+          <a:fontRef idx="minor"/>
+        </p:style>
         <p:txBody>
           <a:bodyPr lIns="90000" rIns="90000" tIns="45000" bIns="45000">
             <a:noAutofit/>
           </a:bodyPr>
           <a:p>
-            <a:pPr marL="216000" indent="-216000">
+            <a:pPr marL="216000" indent="-215640">
               <a:lnSpc>
                 <a:spcPct val="100000"/>
               </a:lnSpc>
@@ -6758,105 +6723,50 @@
               <a:rPr b="0" lang="en-US" sz="1800" spc="-1" strike="noStrike">
                 <a:latin typeface="Arial"/>
               </a:rPr>
-              <a:t>Et affiliation-</a:t>
+              <a:t>Et affiliation-datasæt med 57,643 </a:t>
+            </a:r>
+            <a:r>
+              <a:rPr b="0" i="1" lang="en-US" sz="1800" spc="-1" strike="noStrike">
+                <a:latin typeface="Arial"/>
+              </a:rPr>
+              <a:t>personers</a:t>
             </a:r>
             <a:r>
               <a:rPr b="0" lang="en-US" sz="1800" spc="-1" strike="noStrike">
                 <a:latin typeface="Arial"/>
               </a:rPr>
-              <a:t>datasæt med </a:t>
+              <a:t> i alt 81,429 </a:t>
+            </a:r>
+            <a:r>
+              <a:rPr b="0" i="1" lang="en-US" sz="1800" spc="-1" strike="noStrike">
+                <a:latin typeface="Arial"/>
+              </a:rPr>
+              <a:t>poster</a:t>
             </a:r>
             <a:r>
               <a:rPr b="0" lang="en-US" sz="1800" spc="-1" strike="noStrike">
                 <a:latin typeface="Arial"/>
               </a:rPr>
-              <a:t>57,643 </a:t>
+              <a:t> i 11,316 </a:t>
             </a:r>
             <a:r>
               <a:rPr b="0" i="1" lang="en-US" sz="1800" spc="-1" strike="noStrike">
                 <a:latin typeface="Arial"/>
               </a:rPr>
-              <a:t>personers</a:t>
+              <a:t>organisationer</a:t>
             </a:r>
             <a:r>
               <a:rPr b="0" lang="en-US" sz="1800" spc="-1" strike="noStrike">
                 <a:latin typeface="Arial"/>
               </a:rPr>
-              <a:t> i </a:t>
-            </a:r>
-            <a:r>
-              <a:rPr b="0" lang="en-US" sz="1800" spc="-1" strike="noStrike">
-                <a:latin typeface="Arial"/>
-              </a:rPr>
-              <a:t>alt 81,429 </a:t>
-            </a:r>
-            <a:r>
-              <a:rPr b="0" i="1" lang="en-US" sz="1800" spc="-1" strike="noStrike">
-                <a:latin typeface="Arial"/>
-              </a:rPr>
-              <a:t>poster</a:t>
-            </a:r>
-            <a:r>
-              <a:rPr b="0" lang="en-US" sz="1800" spc="-1" strike="noStrike">
-                <a:latin typeface="Arial"/>
-              </a:rPr>
-              <a:t> i </a:t>
-            </a:r>
-            <a:r>
-              <a:rPr b="0" lang="en-US" sz="1800" spc="-1" strike="noStrike">
-                <a:latin typeface="Arial"/>
-              </a:rPr>
-              <a:t>11,318 </a:t>
-            </a:r>
-            <a:r>
-              <a:rPr b="0" i="1" lang="en-US" sz="1800" spc="-1" strike="noStrike">
-                <a:latin typeface="Arial"/>
-              </a:rPr>
-              <a:t>organisationer</a:t>
-            </a:r>
-            <a:r>
-              <a:rPr b="0" lang="en-US" sz="1800" spc="-1" strike="noStrike">
-                <a:latin typeface="Arial"/>
-              </a:rPr>
-              <a:t> </a:t>
-            </a:r>
-            <a:r>
-              <a:rPr b="0" lang="en-US" sz="1800" spc="-1" strike="noStrike">
-                <a:latin typeface="Arial"/>
-              </a:rPr>
-              <a:t>(virksomheds- og </a:t>
-            </a:r>
-            <a:r>
-              <a:rPr b="0" lang="en-US" sz="1800" spc="-1" strike="noStrike">
-                <a:latin typeface="Arial"/>
-              </a:rPr>
-              <a:t>foreningsbestyrels</a:t>
-            </a:r>
-            <a:r>
-              <a:rPr b="0" lang="en-US" sz="1800" spc="-1" strike="noStrike">
-                <a:latin typeface="Arial"/>
-              </a:rPr>
-              <a:t>er; fora; nævn; </a:t>
-            </a:r>
-            <a:r>
-              <a:rPr b="0" lang="en-US" sz="1800" spc="-1" strike="noStrike">
-                <a:latin typeface="Arial"/>
-              </a:rPr>
-              <a:t>råd; mødesteder </a:t>
-            </a:r>
-            <a:r>
-              <a:rPr b="0" lang="en-US" sz="1800" spc="-1" strike="noStrike">
-                <a:latin typeface="Arial"/>
-              </a:rPr>
-              <a:t>osv.)</a:t>
+              <a:t> (virksomheds- og foreningsbestyrelser; fora; nævn; råd; mødesteder osv.)</a:t>
             </a:r>
             <a:endParaRPr b="0" lang="en-US" sz="1800" spc="-1" strike="noStrike">
               <a:latin typeface="Arial"/>
-              <a:ea typeface="Noto Sans CJK SC"/>
-            </a:endParaRPr>
-          </a:p>
-          <a:p>
-            <a:pPr lvl="2" marL="648000" indent="-216000">
+            </a:endParaRPr>
+          </a:p>
+          <a:p>
+            <a:pPr lvl="2" marL="648000" indent="-215640">
               <a:lnSpc>
                 <a:spcPct val="100000"/>
               </a:lnSpc>
@@ -6878,39 +6788,10 @@
                 <a:latin typeface="Arial"/>
                 <a:ea typeface="Noto Sans CJK SC"/>
               </a:rPr>
-              <a:t>noget er </a:t>
-            </a:r>
-            <a:r>
-              <a:rPr b="0" lang="en-US" sz="1800" spc="-1" strike="noStrike">
-                <a:latin typeface="Arial"/>
-                <a:ea typeface="Noto Sans CJK SC"/>
-              </a:rPr>
-              <a:t>trukket fra cvr </a:t>
-            </a:r>
-            <a:r>
-              <a:rPr b="0" lang="en-US" sz="1800" spc="-1" strike="noStrike">
-                <a:latin typeface="Arial"/>
-                <a:ea typeface="Noto Sans CJK SC"/>
-              </a:rPr>
-              <a:t>| andet er </a:t>
-            </a:r>
-            <a:r>
-              <a:rPr b="0" lang="en-US" sz="1800" spc="-1" strike="noStrike">
-                <a:latin typeface="Arial"/>
-                <a:ea typeface="Noto Sans CJK SC"/>
-              </a:rPr>
-              <a:t>indsamlet </a:t>
-            </a:r>
-            <a:r>
-              <a:rPr b="0" lang="en-US" sz="1800" spc="-1" strike="noStrike">
-                <a:latin typeface="Arial"/>
-                <a:ea typeface="Noto Sans CJK SC"/>
-              </a:rPr>
-              <a:t>manuelt</a:t>
+              <a:t>noget er trukket fra cvr | andet er indsamlet manuelt</a:t>
             </a:r>
             <a:endParaRPr b="0" lang="en-US" sz="1800" spc="-1" strike="noStrike">
               <a:latin typeface="Arial"/>
-              <a:ea typeface="Noto Sans CJK SC"/>
             </a:endParaRPr>
           </a:p>
         </p:txBody>
@@ -6923,7 +6804,7 @@
         </p:nvGraphicFramePr>
         <p:xfrm>
           <a:off x="4191120" y="2066760"/>
-          <a:ext cx="5182920" cy="4909320"/>
+          <a:ext cx="5674680" cy="3033720"/>
         </p:xfrm>
         <a:graphic>
           <a:graphicData uri="http://schemas.openxmlformats.org/drawingml/2006/table">
@@ -6937,17 +6818,22 @@
               <a:tr h="222120">
                 <a:tc>
                   <a:txBody>
-                    <a:bodyPr lIns="90000" rIns="90000" tIns="46800" bIns="46800">
+                    <a:bodyPr lIns="90000" rIns="90000">
                       <a:noAutofit/>
                     </a:bodyPr>
                     <a:p>
+                      <a:pPr>
+                        <a:lnSpc>
+                          <a:spcPct val="100000"/>
+                        </a:lnSpc>
+                      </a:pPr>
                       <a:r>
                         <a:rPr b="1" lang="en-US" sz="900" spc="-1" strike="noStrike">
                           <a:latin typeface="Arial"/>
                         </a:rPr>
                         <a:t>Personer</a:t>
                       </a:r>
-                      <a:endParaRPr b="1" lang="en-US" sz="900" spc="-1" strike="noStrike">
+                      <a:endParaRPr b="0" lang="en-US" sz="900" spc="-1" strike="noStrike">
                         <a:latin typeface="Arial"/>
                       </a:endParaRPr>
                     </a:p>
@@ -6980,17 +6866,22 @@
                 </a:tc>
                 <a:tc>
                   <a:txBody>
-                    <a:bodyPr lIns="90000" rIns="90000" tIns="46800" bIns="46800">
+                    <a:bodyPr lIns="90000" rIns="90000">
                       <a:noAutofit/>
                     </a:bodyPr>
                     <a:p>
+                      <a:pPr>
+                        <a:lnSpc>
+                          <a:spcPct val="100000"/>
+                        </a:lnSpc>
+                      </a:pPr>
                       <a:r>
                         <a:rPr b="1" lang="en-US" sz="900" spc="-1" strike="noStrike">
                           <a:latin typeface="Arial"/>
                         </a:rPr>
                         <a:t>Position</a:t>
                       </a:r>
-                      <a:endParaRPr b="1" lang="en-US" sz="900" spc="-1" strike="noStrike">
+                      <a:endParaRPr b="0" lang="en-US" sz="900" spc="-1" strike="noStrike">
                         <a:latin typeface="Arial"/>
                       </a:endParaRPr>
                     </a:p>
@@ -7023,17 +6914,22 @@
                 </a:tc>
                 <a:tc>
                   <a:txBody>
-                    <a:bodyPr lIns="90000" rIns="90000" tIns="46800" bIns="46800">
+                    <a:bodyPr lIns="90000" rIns="90000">
                       <a:noAutofit/>
                     </a:bodyPr>
                     <a:p>
+                      <a:pPr>
+                        <a:lnSpc>
+                          <a:spcPct val="100000"/>
+                        </a:lnSpc>
+                      </a:pPr>
                       <a:r>
                         <a:rPr b="1" lang="en-US" sz="900" spc="-1" strike="noStrike">
                           <a:latin typeface="Arial"/>
                         </a:rPr>
                         <a:t>Affilation</a:t>
                       </a:r>
-                      <a:endParaRPr b="1" lang="en-US" sz="900" spc="-1" strike="noStrike">
+                      <a:endParaRPr b="0" lang="en-US" sz="900" spc="-1" strike="noStrike">
                         <a:latin typeface="Arial"/>
                       </a:endParaRPr>
                     </a:p>
@@ -7068,10 +6964,15 @@
               <a:tr h="216000">
                 <a:tc>
                   <a:txBody>
-                    <a:bodyPr lIns="90000" rIns="90000" tIns="46800" bIns="46800">
+                    <a:bodyPr lIns="90000" rIns="90000">
                       <a:noAutofit/>
                     </a:bodyPr>
                     <a:p>
+                      <a:pPr>
+                        <a:lnSpc>
+                          <a:spcPct val="100000"/>
+                        </a:lnSpc>
+                      </a:pPr>
                       <a:r>
                         <a:rPr b="0" lang="en-US" sz="900" spc="-1" strike="noStrike">
                           <a:latin typeface="Arial"/>
@@ -7111,10 +7012,15 @@
                 </a:tc>
                 <a:tc>
                   <a:txBody>
-                    <a:bodyPr lIns="90000" rIns="90000" tIns="46800" bIns="46800">
+                    <a:bodyPr lIns="90000" rIns="90000">
                       <a:noAutofit/>
                     </a:bodyPr>
                     <a:p>
+                      <a:pPr>
+                        <a:lnSpc>
+                          <a:spcPct val="100000"/>
+                        </a:lnSpc>
+                      </a:pPr>
                       <a:r>
                         <a:rPr b="0" lang="en-US" sz="900" spc="-1" strike="noStrike">
                           <a:latin typeface="Arial"/>
@@ -7154,10 +7060,15 @@
                 </a:tc>
                 <a:tc>
                   <a:txBody>
-                    <a:bodyPr lIns="90000" rIns="90000" tIns="46800" bIns="46800">
+                    <a:bodyPr lIns="90000" rIns="90000">
                       <a:noAutofit/>
                     </a:bodyPr>
                     <a:p>
+                      <a:pPr>
+                        <a:lnSpc>
+                          <a:spcPct val="100000"/>
+                        </a:lnSpc>
+                      </a:pPr>
                       <a:r>
                         <a:rPr b="0" lang="en-US" sz="900" spc="-1" strike="noStrike">
                           <a:latin typeface="Arial"/>
@@ -7199,10 +7110,15 @@
               <a:tr h="216000">
                 <a:tc>
                   <a:txBody>
-                    <a:bodyPr lIns="90000" rIns="90000" tIns="46800" bIns="46800">
+                    <a:bodyPr lIns="90000" rIns="90000">
                       <a:noAutofit/>
                     </a:bodyPr>
                     <a:p>
+                      <a:pPr>
+                        <a:lnSpc>
+                          <a:spcPct val="100000"/>
+                        </a:lnSpc>
+                      </a:pPr>
                       <a:r>
                         <a:rPr b="0" lang="en-US" sz="900" spc="-1" strike="noStrike">
                           <a:latin typeface="Arial"/>
@@ -7242,10 +7158,15 @@
                 </a:tc>
                 <a:tc>
                   <a:txBody>
-                    <a:bodyPr lIns="90000" rIns="90000" tIns="46800" bIns="46800">
+                    <a:bodyPr lIns="90000" rIns="90000">
                       <a:noAutofit/>
                     </a:bodyPr>
                     <a:p>
+                      <a:pPr>
+                        <a:lnSpc>
+                          <a:spcPct val="100000"/>
+                        </a:lnSpc>
+                      </a:pPr>
                       <a:r>
                         <a:rPr b="0" lang="en-US" sz="900" spc="-1" strike="noStrike">
                           <a:latin typeface="Arial"/>
@@ -7285,10 +7206,15 @@
                 </a:tc>
                 <a:tc>
                   <a:txBody>
-                    <a:bodyPr lIns="90000" rIns="90000" tIns="46800" bIns="46800">
+                    <a:bodyPr lIns="90000" rIns="90000">
                       <a:noAutofit/>
                     </a:bodyPr>
                     <a:p>
+                      <a:pPr>
+                        <a:lnSpc>
+                          <a:spcPct val="100000"/>
+                        </a:lnSpc>
+                      </a:pPr>
                       <a:r>
                         <a:rPr b="0" lang="en-US" sz="900" spc="-1" strike="noStrike">
                           <a:latin typeface="Arial"/>
@@ -7330,10 +7256,15 @@
               <a:tr h="219960">
                 <a:tc>
                   <a:txBody>
-                    <a:bodyPr lIns="90000" rIns="90000" tIns="46800" bIns="46800">
+                    <a:bodyPr lIns="90000" rIns="90000">
                       <a:noAutofit/>
                     </a:bodyPr>
                     <a:p>
+                      <a:pPr>
+                        <a:lnSpc>
+                          <a:spcPct val="100000"/>
+                        </a:lnSpc>
+                      </a:pPr>
                       <a:r>
                         <a:rPr b="0" lang="en-US" sz="900" spc="-1" strike="noStrike">
                           <a:latin typeface="Arial"/>
@@ -7373,10 +7304,15 @@
                 </a:tc>
                 <a:tc>
                   <a:txBody>
-                    <a:bodyPr lIns="90000" rIns="90000" tIns="46800" bIns="46800">
+                    <a:bodyPr lIns="90000" rIns="90000">
                       <a:noAutofit/>
                     </a:bodyPr>
                     <a:p>
+                      <a:pPr>
+                        <a:lnSpc>
+                          <a:spcPct val="100000"/>
+                        </a:lnSpc>
+                      </a:pPr>
                       <a:r>
                         <a:rPr b="0" lang="en-US" sz="900" spc="-1" strike="noStrike">
                           <a:latin typeface="Arial"/>
@@ -7416,10 +7352,15 @@
                 </a:tc>
                 <a:tc>
                   <a:txBody>
-                    <a:bodyPr lIns="90000" rIns="90000" tIns="46800" bIns="46800">
+                    <a:bodyPr lIns="90000" rIns="90000">
                       <a:noAutofit/>
                     </a:bodyPr>
                     <a:p>
+                      <a:pPr>
+                        <a:lnSpc>
+                          <a:spcPct val="100000"/>
+                        </a:lnSpc>
+                      </a:pPr>
                       <a:r>
                         <a:rPr b="0" lang="en-US" sz="900" spc="-1" strike="noStrike">
                           <a:latin typeface="Arial"/>
@@ -7461,10 +7402,15 @@
               <a:tr h="216000">
                 <a:tc>
                   <a:txBody>
-                    <a:bodyPr lIns="90000" rIns="90000" tIns="46800" bIns="46800">
+                    <a:bodyPr lIns="90000" rIns="90000">
                       <a:noAutofit/>
                     </a:bodyPr>
                     <a:p>
+                      <a:pPr>
+                        <a:lnSpc>
+                          <a:spcPct val="100000"/>
+                        </a:lnSpc>
+                      </a:pPr>
                       <a:r>
                         <a:rPr b="0" lang="en-US" sz="900" spc="-1" strike="noStrike">
                           <a:latin typeface="Arial"/>
@@ -7531,10 +7477,15 @@
                 </a:tc>
                 <a:tc>
                   <a:txBody>
-                    <a:bodyPr lIns="90000" rIns="90000" tIns="46800" bIns="46800">
+                    <a:bodyPr lIns="90000" rIns="90000">
                       <a:noAutofit/>
                     </a:bodyPr>
                     <a:p>
+                      <a:pPr>
+                        <a:lnSpc>
+                          <a:spcPct val="100000"/>
+                        </a:lnSpc>
+                      </a:pPr>
                       <a:r>
                         <a:rPr b="0" lang="en-US" sz="900" spc="-1" strike="noStrike">
                           <a:latin typeface="Arial"/>
@@ -7576,10 +7527,15 @@
               <a:tr h="216000">
                 <a:tc>
                   <a:txBody>
-                    <a:bodyPr lIns="90000" rIns="90000" tIns="46800" bIns="46800">
+                    <a:bodyPr lIns="90000" rIns="90000">
                       <a:noAutofit/>
                     </a:bodyPr>
                     <a:p>
+                      <a:pPr>
+                        <a:lnSpc>
+                          <a:spcPct val="100000"/>
+                        </a:lnSpc>
+                      </a:pPr>
                       <a:r>
                         <a:rPr b="0" lang="en-US" sz="900" spc="-1" strike="noStrike">
                           <a:latin typeface="Arial"/>
@@ -7646,10 +7602,15 @@
                 </a:tc>
                 <a:tc>
                   <a:txBody>
-                    <a:bodyPr lIns="90000" rIns="90000" tIns="46800" bIns="46800">
+                    <a:bodyPr lIns="90000" rIns="90000">
                       <a:noAutofit/>
                     </a:bodyPr>
                     <a:p>
+                      <a:pPr>
+                        <a:lnSpc>
+                          <a:spcPct val="100000"/>
+                        </a:lnSpc>
+                      </a:pPr>
                       <a:r>
                         <a:rPr b="0" lang="en-US" sz="900" spc="-1" strike="noStrike">
                           <a:latin typeface="Arial"/>
@@ -7691,10 +7652,15 @@
               <a:tr h="216000">
                 <a:tc>
                   <a:txBody>
-                    <a:bodyPr lIns="90000" rIns="90000" tIns="46800" bIns="46800">
+                    <a:bodyPr lIns="90000" rIns="90000">
                       <a:noAutofit/>
                     </a:bodyPr>
                     <a:p>
+                      <a:pPr>
+                        <a:lnSpc>
+                          <a:spcPct val="100000"/>
+                        </a:lnSpc>
+                      </a:pPr>
                       <a:r>
                         <a:rPr b="0" lang="en-US" sz="900" spc="-1" strike="noStrike">
                           <a:latin typeface="Arial"/>
@@ -7761,10 +7727,15 @@
                 </a:tc>
                 <a:tc>
                   <a:txBody>
-                    <a:bodyPr lIns="90000" rIns="90000" tIns="46800" bIns="46800">
+                    <a:bodyPr lIns="90000" rIns="90000">
                       <a:noAutofit/>
                     </a:bodyPr>
                     <a:p>
+                      <a:pPr>
+                        <a:lnSpc>
+                          <a:spcPct val="100000"/>
+                        </a:lnSpc>
+                      </a:pPr>
                       <a:r>
                         <a:rPr b="0" lang="en-US" sz="900" spc="-1" strike="noStrike">
                           <a:latin typeface="Arial"/>
@@ -7860,10 +7831,15 @@
                 </a:tc>
                 <a:tc>
                   <a:txBody>
-                    <a:bodyPr lIns="90000" rIns="90000" tIns="46800" bIns="46800">
+                    <a:bodyPr lIns="90000" rIns="90000">
                       <a:noAutofit/>
                     </a:bodyPr>
                     <a:p>
+                      <a:pPr>
+                        <a:lnSpc>
+                          <a:spcPct val="100000"/>
+                        </a:lnSpc>
+                      </a:pPr>
                       <a:r>
                         <a:rPr b="0" lang="en-US" sz="900" spc="-1" strike="noStrike">
                           <a:latin typeface="Arial"/>
@@ -7959,10 +7935,15 @@
                 </a:tc>
                 <a:tc>
                   <a:txBody>
-                    <a:bodyPr lIns="90000" rIns="90000" tIns="46800" bIns="46800">
+                    <a:bodyPr lIns="90000" rIns="90000">
                       <a:noAutofit/>
                     </a:bodyPr>
                     <a:p>
+                      <a:pPr>
+                        <a:lnSpc>
+                          <a:spcPct val="100000"/>
+                        </a:lnSpc>
+                      </a:pPr>
                       <a:r>
                         <a:rPr b="0" lang="en-US" sz="900" spc="-1" strike="noStrike">
                           <a:latin typeface="Arial"/>
@@ -8058,10 +8039,15 @@
                 </a:tc>
                 <a:tc>
                   <a:txBody>
-                    <a:bodyPr lIns="90000" rIns="90000" tIns="46800" bIns="46800">
+                    <a:bodyPr lIns="90000" rIns="90000">
                       <a:noAutofit/>
                     </a:bodyPr>
                     <a:p>
+                      <a:pPr>
+                        <a:lnSpc>
+                          <a:spcPct val="100000"/>
+                        </a:lnSpc>
+                      </a:pPr>
                       <a:r>
                         <a:rPr b="0" lang="en-US" sz="900" spc="-1" strike="noStrike">
                           <a:latin typeface="Arial"/>
@@ -8157,10 +8143,15 @@
                 </a:tc>
                 <a:tc>
                   <a:txBody>
-                    <a:bodyPr lIns="90000" rIns="90000" tIns="46800" bIns="46800">
+                    <a:bodyPr lIns="90000" rIns="90000">
                       <a:noAutofit/>
                     </a:bodyPr>
                     <a:p>
+                      <a:pPr>
+                        <a:lnSpc>
+                          <a:spcPct val="100000"/>
+                        </a:lnSpc>
+                      </a:pPr>
                       <a:r>
                         <a:rPr b="0" lang="en-US" sz="900" spc="-1" strike="noStrike">
                           <a:latin typeface="Arial"/>
@@ -8256,10 +8247,15 @@
                 </a:tc>
                 <a:tc>
                   <a:txBody>
-                    <a:bodyPr lIns="90000" rIns="90000" tIns="46800" bIns="46800">
+                    <a:bodyPr lIns="90000" rIns="90000">
                       <a:noAutofit/>
                     </a:bodyPr>
                     <a:p>
+                      <a:pPr>
+                        <a:lnSpc>
+                          <a:spcPct val="100000"/>
+                        </a:lnSpc>
+                      </a:pPr>
                       <a:r>
                         <a:rPr b="0" lang="en-US" sz="900" spc="-1" strike="noStrike">
                           <a:latin typeface="Arial"/>
@@ -8355,10 +8351,15 @@
                 </a:tc>
                 <a:tc>
                   <a:txBody>
-                    <a:bodyPr lIns="90000" rIns="90000" tIns="46800" bIns="46800">
+                    <a:bodyPr lIns="90000" rIns="90000">
                       <a:noAutofit/>
                     </a:bodyPr>
                     <a:p>
+                      <a:pPr>
+                        <a:lnSpc>
+                          <a:spcPct val="100000"/>
+                        </a:lnSpc>
+                      </a:pPr>
                       <a:r>
                         <a:rPr b="0" lang="en-US" sz="900" spc="-1" strike="noStrike">
                           <a:latin typeface="Arial"/>
@@ -8454,10 +8455,15 @@
                 </a:tc>
                 <a:tc>
                   <a:txBody>
-                    <a:bodyPr lIns="90000" rIns="90000" tIns="46800" bIns="46800">
+                    <a:bodyPr lIns="90000" rIns="90000">
                       <a:noAutofit/>
                     </a:bodyPr>
                     <a:p>
+                      <a:pPr>
+                        <a:lnSpc>
+                          <a:spcPct val="100000"/>
+                        </a:lnSpc>
+                      </a:pPr>
                       <a:r>
                         <a:rPr b="0" lang="en-US" sz="900" spc="-1" strike="noStrike">
                           <a:latin typeface="Arial"/>
@@ -8503,13 +8509,13 @@
       <p:sp>
         <p:nvSpPr>
           <p:cNvPr id="139" name=""/>
-          <p:cNvSpPr txBox="1"/>
+          <p:cNvSpPr/>
           <p:nvPr/>
         </p:nvSpPr>
         <p:spPr>
           <a:xfrm>
             <a:off x="118800" y="3532320"/>
-            <a:ext cx="3865680" cy="277920"/>
+            <a:ext cx="3865320" cy="277560"/>
           </a:xfrm>
           <a:prstGeom prst="rect">
             <a:avLst/>
@@ -8519,22 +8525,27 @@
             <a:noFill/>
           </a:ln>
         </p:spPr>
+        <p:style>
+          <a:lnRef idx="0"/>
+          <a:fillRef idx="0"/>
+          <a:effectRef idx="0"/>
+          <a:fontRef idx="minor"/>
+        </p:style>
         <p:txBody>
           <a:bodyPr lIns="90000" rIns="90000" tIns="45000" bIns="45000">
             <a:noAutofit/>
           </a:bodyPr>
           <a:p>
+            <a:pPr>
+              <a:lnSpc>
+                <a:spcPct val="100000"/>
+              </a:lnSpc>
+            </a:pPr>
             <a:r>
               <a:rPr b="0" lang="en-US" sz="1300" spc="-1" strike="noStrike">
                 <a:latin typeface="Arial"/>
               </a:rPr>
-              <a:t>nummerisk branche kode fra </a:t>
-            </a:r>
-            <a:r>
-              <a:rPr b="0" lang="en-US" sz="1300" spc="-1" strike="noStrike">
-                <a:latin typeface="Arial"/>
-              </a:rPr>
-              <a:t>cvr (når den findes)</a:t>
+              <a:t>nummerisk branche kode fra cvr (når den findes)</a:t>
             </a:r>
             <a:endParaRPr b="0" lang="en-US" sz="1300" spc="-1" strike="noStrike">
               <a:latin typeface="Arial"/>
@@ -8545,13 +8556,13 @@
       <p:sp>
         <p:nvSpPr>
           <p:cNvPr id="140" name=""/>
-          <p:cNvSpPr txBox="1"/>
+          <p:cNvSpPr/>
           <p:nvPr/>
         </p:nvSpPr>
         <p:spPr>
           <a:xfrm>
             <a:off x="118800" y="3316680"/>
-            <a:ext cx="3278160" cy="274680"/>
+            <a:ext cx="3277800" cy="274320"/>
           </a:xfrm>
           <a:prstGeom prst="rect">
             <a:avLst/>
@@ -8561,22 +8572,27 @@
             <a:noFill/>
           </a:ln>
         </p:spPr>
+        <p:style>
+          <a:lnRef idx="0"/>
+          <a:fillRef idx="0"/>
+          <a:effectRef idx="0"/>
+          <a:fontRef idx="minor"/>
+        </p:style>
         <p:txBody>
           <a:bodyPr lIns="90000" rIns="90000" tIns="45000" bIns="45000">
             <a:noAutofit/>
           </a:bodyPr>
           <a:p>
+            <a:pPr>
+              <a:lnSpc>
+                <a:spcPct val="100000"/>
+              </a:lnSpc>
+            </a:pPr>
             <a:r>
               <a:rPr b="0" lang="en-US" sz="1300" spc="-1" strike="noStrike">
                 <a:latin typeface="Arial"/>
               </a:rPr>
-              <a:t>kodning af sketor ud fra </a:t>
-            </a:r>
-            <a:r>
-              <a:rPr b="0" lang="en-US" sz="1300" spc="-1" strike="noStrike">
-                <a:latin typeface="Arial"/>
-              </a:rPr>
-              <a:t>branchekode</a:t>
+              <a:t>kodning af sketor ud fra branchekode</a:t>
             </a:r>
             <a:endParaRPr b="0" lang="en-US" sz="1300" spc="-1" strike="noStrike">
               <a:latin typeface="Arial"/>
@@ -8587,13 +8603,13 @@
       <p:sp>
         <p:nvSpPr>
           <p:cNvPr id="141" name=""/>
-          <p:cNvSpPr txBox="1"/>
+          <p:cNvSpPr/>
           <p:nvPr/>
         </p:nvSpPr>
         <p:spPr>
           <a:xfrm>
             <a:off x="118800" y="3810240"/>
-            <a:ext cx="3278160" cy="459000"/>
+            <a:ext cx="3277800" cy="458640"/>
           </a:xfrm>
           <a:prstGeom prst="rect">
             <a:avLst/>
@@ -8603,28 +8619,27 @@
             <a:noFill/>
           </a:ln>
         </p:spPr>
+        <p:style>
+          <a:lnRef idx="0"/>
+          <a:fillRef idx="0"/>
+          <a:effectRef idx="0"/>
+          <a:fontRef idx="minor"/>
+        </p:style>
         <p:txBody>
           <a:bodyPr lIns="90000" rIns="90000" tIns="45000" bIns="45000">
             <a:noAutofit/>
           </a:bodyPr>
           <a:p>
+            <a:pPr>
+              <a:lnSpc>
+                <a:spcPct val="100000"/>
+              </a:lnSpc>
+            </a:pPr>
             <a:r>
               <a:rPr b="0" lang="en-US" sz="1300" spc="-1" strike="noStrike">
                 <a:latin typeface="Arial"/>
               </a:rPr>
-              <a:t>branchekode tekst på 5 </a:t>
-            </a:r>
-            <a:r>
-              <a:rPr b="0" lang="en-US" sz="1300" spc="-1" strike="noStrike">
-                <a:latin typeface="Arial"/>
-              </a:rPr>
-              <a:t>niveauer, hvor 5 er det mest </a:t>
-            </a:r>
-            <a:r>
-              <a:rPr b="0" lang="en-US" sz="1300" spc="-1" strike="noStrike">
-                <a:latin typeface="Arial"/>
-              </a:rPr>
-              <a:t>detaljerede</a:t>
+              <a:t>branchekode tekst på 5 niveauer, hvor 5 er det mest detaljerede</a:t>
             </a:r>
             <a:endParaRPr b="0" lang="en-US" sz="1300" spc="-1" strike="noStrike">
               <a:latin typeface="Arial"/>
@@ -8719,13 +8734,13 @@
       <p:sp>
         <p:nvSpPr>
           <p:cNvPr id="145" name=""/>
-          <p:cNvSpPr txBox="1"/>
+          <p:cNvSpPr/>
           <p:nvPr/>
         </p:nvSpPr>
         <p:spPr>
           <a:xfrm>
             <a:off x="118800" y="4206600"/>
-            <a:ext cx="4310280" cy="459000"/>
+            <a:ext cx="4309920" cy="458640"/>
           </a:xfrm>
           <a:prstGeom prst="rect">
             <a:avLst/>
@@ -8735,11 +8750,22 @@
             <a:noFill/>
           </a:ln>
         </p:spPr>
+        <p:style>
+          <a:lnRef idx="0"/>
+          <a:fillRef idx="0"/>
+          <a:effectRef idx="0"/>
+          <a:fontRef idx="minor"/>
+        </p:style>
         <p:txBody>
           <a:bodyPr lIns="90000" rIns="90000" tIns="45000" bIns="45000">
             <a:noAutofit/>
           </a:bodyPr>
           <a:p>
+            <a:pPr>
+              <a:lnSpc>
+                <a:spcPct val="100000"/>
+              </a:lnSpc>
+            </a:pPr>
             <a:r>
               <a:rPr b="0" lang="en-US" sz="1300" spc="-1" strike="noStrike">
                 <a:latin typeface="Arial"/>
@@ -8750,13 +8776,7 @@
               <a:rPr b="0" lang="en-US" sz="1300" spc="-1" strike="noStrike">
                 <a:latin typeface="Arial"/>
               </a:rPr>
-              <a:t>sektor/emne’ tags for de </a:t>
-            </a:r>
-            <a:r>
-              <a:rPr b="0" lang="en-US" sz="1300" spc="-1" strike="noStrike">
-                <a:latin typeface="Arial"/>
-              </a:rPr>
-              <a:t>affiliations, der ikke er fra cvr</a:t>
+              <a:t>sektor/emne’ tags for de affiliations, der ikke er fra cvr</a:t>
             </a:r>
             <a:endParaRPr b="0" lang="en-US" sz="1300" spc="-1" strike="noStrike">
               <a:latin typeface="Arial"/>
@@ -8795,13 +8815,13 @@
       <p:sp>
         <p:nvSpPr>
           <p:cNvPr id="147" name=""/>
-          <p:cNvSpPr txBox="1"/>
+          <p:cNvSpPr/>
           <p:nvPr/>
         </p:nvSpPr>
         <p:spPr>
           <a:xfrm>
             <a:off x="118800" y="2229120"/>
-            <a:ext cx="3373560" cy="643320"/>
+            <a:ext cx="3373200" cy="642960"/>
           </a:xfrm>
           <a:prstGeom prst="rect">
             <a:avLst/>
@@ -8811,28 +8831,27 @@
             <a:noFill/>
           </a:ln>
         </p:spPr>
+        <p:style>
+          <a:lnRef idx="0"/>
+          <a:fillRef idx="0"/>
+          <a:effectRef idx="0"/>
+          <a:fontRef idx="minor"/>
+        </p:style>
         <p:txBody>
           <a:bodyPr lIns="90000" rIns="90000" tIns="45000" bIns="45000">
             <a:noAutofit/>
           </a:bodyPr>
           <a:p>
+            <a:pPr>
+              <a:lnSpc>
+                <a:spcPct val="100000"/>
+              </a:lnSpc>
+            </a:pPr>
             <a:r>
               <a:rPr b="0" lang="en-US" sz="1300" spc="-1" strike="noStrike">
                 <a:latin typeface="Arial"/>
               </a:rPr>
-              <a:t>TRUE/FALSE om rollen er en </a:t>
-            </a:r>
-            <a:r>
-              <a:rPr b="0" lang="en-US" sz="1300" spc="-1" strike="noStrike">
-                <a:latin typeface="Arial"/>
-              </a:rPr>
-              <a:t>ledelsesrolle eller ej </a:t>
-            </a:r>
-            <a:r>
-              <a:rPr b="0" lang="en-US" sz="1300" spc="-1" strike="noStrike">
-                <a:latin typeface="Arial"/>
-              </a:rPr>
-              <a:t>(formand, direktør osv.)</a:t>
+              <a:t>TRUE/FALSE om rollen er en ledelsesrolle eller ej (formand, direktør osv.)</a:t>
             </a:r>
             <a:endParaRPr b="0" lang="en-US" sz="1300" spc="-1" strike="noStrike">
               <a:latin typeface="Arial"/>
@@ -8871,13 +8890,13 @@
       <p:sp>
         <p:nvSpPr>
           <p:cNvPr id="149" name=""/>
-          <p:cNvSpPr txBox="1"/>
+          <p:cNvSpPr/>
           <p:nvPr/>
         </p:nvSpPr>
         <p:spPr>
           <a:xfrm>
             <a:off x="154800" y="2849040"/>
-            <a:ext cx="3278160" cy="274680"/>
+            <a:ext cx="3277800" cy="274320"/>
           </a:xfrm>
           <a:prstGeom prst="rect">
             <a:avLst/>
@@ -8887,22 +8906,27 @@
             <a:noFill/>
           </a:ln>
         </p:spPr>
+        <p:style>
+          <a:lnRef idx="0"/>
+          <a:fillRef idx="0"/>
+          <a:effectRef idx="0"/>
+          <a:fontRef idx="minor"/>
+        </p:style>
         <p:txBody>
           <a:bodyPr lIns="90000" rIns="90000" tIns="45000" bIns="45000">
             <a:noAutofit/>
           </a:bodyPr>
           <a:p>
+            <a:pPr>
+              <a:lnSpc>
+                <a:spcPct val="100000"/>
+              </a:lnSpc>
+            </a:pPr>
             <a:r>
               <a:rPr b="0" lang="en-US" sz="1300" spc="-1" strike="noStrike">
                 <a:latin typeface="Arial"/>
               </a:rPr>
-              <a:t>hører affiliation’en under en </a:t>
-            </a:r>
-            <a:r>
-              <a:rPr b="0" lang="en-US" sz="1300" spc="-1" strike="noStrike">
-                <a:latin typeface="Arial"/>
-              </a:rPr>
-              <a:t>større affil...</a:t>
+              <a:t>hører affiliation’en under en større affil...</a:t>
             </a:r>
             <a:endParaRPr b="0" lang="en-US" sz="1300" spc="-1" strike="noStrike">
               <a:latin typeface="Arial"/>
@@ -8941,13 +8965,13 @@
       <p:sp>
         <p:nvSpPr>
           <p:cNvPr id="151" name=""/>
-          <p:cNvSpPr txBox="1"/>
+          <p:cNvSpPr/>
           <p:nvPr/>
         </p:nvSpPr>
         <p:spPr>
           <a:xfrm>
             <a:off x="118800" y="3065400"/>
-            <a:ext cx="3278160" cy="274680"/>
+            <a:ext cx="3277800" cy="274320"/>
           </a:xfrm>
           <a:prstGeom prst="rect">
             <a:avLst/>
@@ -8957,22 +8981,27 @@
             <a:noFill/>
           </a:ln>
         </p:spPr>
+        <p:style>
+          <a:lnRef idx="0"/>
+          <a:fillRef idx="0"/>
+          <a:effectRef idx="0"/>
+          <a:fontRef idx="minor"/>
+        </p:style>
         <p:txBody>
           <a:bodyPr lIns="90000" rIns="90000" tIns="45000" bIns="45000">
             <a:noAutofit/>
           </a:bodyPr>
           <a:p>
+            <a:pPr>
+              <a:lnSpc>
+                <a:spcPct val="100000"/>
+              </a:lnSpc>
+            </a:pPr>
             <a:r>
               <a:rPr b="0" lang="en-US" sz="1300" spc="-1" strike="noStrike">
                 <a:latin typeface="Arial"/>
               </a:rPr>
-              <a:t>evt. længere beskrivelse af </a:t>
-            </a:r>
-            <a:r>
-              <a:rPr b="0" lang="en-US" sz="1300" spc="-1" strike="noStrike">
-                <a:latin typeface="Arial"/>
-              </a:rPr>
-              <a:t>affil...</a:t>
+              <a:t>evt. længere beskrivelse af affil...</a:t>
             </a:r>
             <a:endParaRPr b="0" lang="en-US" sz="1300" spc="-1" strike="noStrike">
               <a:latin typeface="Arial"/>
@@ -9047,7 +9076,7 @@
         <p:spPr>
           <a:xfrm>
             <a:off x="3083040" y="2611800"/>
-            <a:ext cx="3960000" cy="474480"/>
+            <a:ext cx="3959640" cy="474120"/>
           </a:xfrm>
           <a:prstGeom prst="rect">
             <a:avLst/>
@@ -9079,6 +9108,7 @@
                   <a:srgbClr val="ffffff"/>
                 </a:solidFill>
                 <a:latin typeface="Source Sans Pro Black"/>
+                <a:ea typeface="DejaVu Sans"/>
               </a:rPr>
               <a:t>#Netværks komponenter….</a:t>
             </a:r>
@@ -9097,7 +9127,7 @@
         <p:spPr>
           <a:xfrm>
             <a:off x="360000" y="270000"/>
-            <a:ext cx="9359280" cy="719280"/>
+            <a:ext cx="9358920" cy="718920"/>
           </a:xfrm>
           <a:prstGeom prst="rect">
             <a:avLst/>
@@ -9148,7 +9178,7 @@
         <p:spPr>
           <a:xfrm>
             <a:off x="428760" y="1600200"/>
-            <a:ext cx="9172080" cy="3200040"/>
+            <a:ext cx="9171720" cy="3199680"/>
           </a:xfrm>
           <a:prstGeom prst="rect">
             <a:avLst/>
@@ -9176,7 +9206,11 @@
             </a:pPr>
             <a:r>
               <a:rPr b="0" lang="en-US" sz="1800" spc="-1" strike="noStrike">
+                <a:solidFill>
+                  <a:srgbClr val="000000"/>
+                </a:solidFill>
                 <a:latin typeface="Arial"/>
+                <a:ea typeface="DejaVu Sans"/>
               </a:rPr>
               <a:t>Find noget data:</a:t>
             </a:r>
@@ -9192,13 +9226,21 @@
             </a:pPr>
             <a:r>
               <a:rPr b="0" lang="en-US" sz="1800" spc="-1" strike="noStrike">
+                <a:solidFill>
+                  <a:srgbClr val="000000"/>
+                </a:solidFill>
                 <a:latin typeface="Arial"/>
+                <a:ea typeface="DejaVu Sans"/>
               </a:rPr>
               <a:t>	</a:t>
             </a:r>
             <a:r>
               <a:rPr b="0" lang="en-US" sz="1800" spc="-1" strike="noStrike">
+                <a:solidFill>
+                  <a:srgbClr val="000000"/>
+                </a:solidFill>
                 <a:latin typeface="Arial"/>
+                <a:ea typeface="DejaVu Sans"/>
               </a:rPr>
               <a:t>- Har vi noget vi er særligt interesseret i? Har arbejdet med tidligere på en anden måde? Kunne forestille os at arbejde med? En branche, et særligt område (vindenergi, biler, finans...)? Et geografisk område? Danmark? Europa? </a:t>
             </a:r>
@@ -9218,6 +9260,7 @@
                   <a:srgbClr val="c9211e"/>
                 </a:solidFill>
                 <a:latin typeface="Arial"/>
+                <a:ea typeface="DejaVu Sans"/>
               </a:rPr>
               <a:t>	</a:t>
             </a:r>
@@ -9227,6 +9270,7 @@
                   <a:srgbClr val="c9211e"/>
                 </a:solidFill>
                 <a:latin typeface="Arial"/>
+                <a:ea typeface="DejaVu Sans"/>
               </a:rPr>
               <a:t>Reflekter over netværks-afgrænsningen..</a:t>
             </a:r>
@@ -9256,6 +9300,7 @@
                   <a:srgbClr val="c9211e"/>
                 </a:solidFill>
                 <a:latin typeface="Arial"/>
+                <a:ea typeface="DejaVu Sans"/>
               </a:rPr>
               <a:t>	</a:t>
             </a:r>
@@ -9265,6 +9310,7 @@
                   <a:srgbClr val="c9211e"/>
                 </a:solidFill>
                 <a:latin typeface="Arial"/>
+                <a:ea typeface="DejaVu Sans"/>
               </a:rPr>
               <a:t>- Hvad betyder de relationer I kigger på? Hvilken betydning tillægger I dem? Handler det om viden, indflydelse, magt?</a:t>
             </a:r>
@@ -9284,6 +9330,7 @@
                   <a:srgbClr val="c9211e"/>
                 </a:solidFill>
                 <a:latin typeface="Arial"/>
+                <a:ea typeface="DejaVu Sans"/>
               </a:rPr>
               <a:t>	</a:t>
             </a:r>
@@ -9293,6 +9340,7 @@
                   <a:srgbClr val="c9211e"/>
                 </a:solidFill>
                 <a:latin typeface="Arial"/>
+                <a:ea typeface="DejaVu Sans"/>
               </a:rPr>
               <a:t>Reflekter over relationen..</a:t>
             </a:r>
@@ -9322,6 +9370,7 @@
                   <a:srgbClr val="000000"/>
                 </a:solidFill>
                 <a:latin typeface="Arial"/>
+                <a:ea typeface="DejaVu Sans"/>
               </a:rPr>
               <a:t>	</a:t>
             </a:r>
@@ -9331,6 +9380,7 @@
                   <a:srgbClr val="000000"/>
                 </a:solidFill>
                 <a:latin typeface="Arial"/>
+                <a:ea typeface="DejaVu Sans"/>
               </a:rPr>
               <a:t>- Er det hvilket netværk er interessant? Det mellem individer? Det mellem virksomheder?</a:t>
             </a:r>
@@ -9379,7 +9429,7 @@
         <p:spPr>
           <a:xfrm>
             <a:off x="360000" y="271080"/>
-            <a:ext cx="9359280" cy="719280"/>
+            <a:ext cx="9358920" cy="718920"/>
           </a:xfrm>
           <a:prstGeom prst="rect">
             <a:avLst/>
@@ -9430,7 +9480,7 @@
         <p:spPr>
           <a:xfrm>
             <a:off x="228600" y="1371600"/>
-            <a:ext cx="9143640" cy="1102320"/>
+            <a:ext cx="9143280" cy="1101960"/>
           </a:xfrm>
           <a:prstGeom prst="rect">
             <a:avLst/>
@@ -9458,7 +9508,11 @@
             </a:pPr>
             <a:r>
               <a:rPr b="0" lang="en-US" sz="1800" spc="-1" strike="noStrike">
+                <a:solidFill>
+                  <a:srgbClr val="000000"/>
+                </a:solidFill>
                 <a:latin typeface="Times New Roman"/>
+                <a:ea typeface="DejaVu Sans"/>
               </a:rPr>
               <a:t>Det kan godt betale sig at prøve noget data af tidligt…</a:t>
             </a:r>
@@ -9484,7 +9538,11 @@
             </a:pPr>
             <a:r>
               <a:rPr b="0" lang="en-US" sz="1800" spc="-1" strike="noStrike">
+                <a:solidFill>
+                  <a:srgbClr val="000000"/>
+                </a:solidFill>
                 <a:latin typeface="Times New Roman"/>
+                <a:ea typeface="DejaVu Sans"/>
               </a:rPr>
               <a:t>Både fordi… ja, så er I i gang. Men også fordi det sagtens kan hænde at I gerne vil studere netværket I branche XYZ, og når I så får lavet data viser det sig at se sådan her ud:</a:t>
             </a:r>
@@ -9503,7 +9561,7 @@
         <p:spPr>
           <a:xfrm>
             <a:off x="986400" y="2743200"/>
-            <a:ext cx="228240" cy="228240"/>
+            <a:ext cx="227880" cy="227880"/>
           </a:xfrm>
           <a:prstGeom prst="ellipse">
             <a:avLst/>
@@ -9533,7 +9591,7 @@
         <p:spPr>
           <a:xfrm>
             <a:off x="2102400" y="2707200"/>
-            <a:ext cx="228240" cy="228240"/>
+            <a:ext cx="227880" cy="227880"/>
           </a:xfrm>
           <a:prstGeom prst="ellipse">
             <a:avLst/>
@@ -9563,7 +9621,7 @@
         <p:spPr>
           <a:xfrm>
             <a:off x="1634400" y="3499200"/>
-            <a:ext cx="228240" cy="228240"/>
+            <a:ext cx="227880" cy="227880"/>
           </a:xfrm>
           <a:prstGeom prst="ellipse">
             <a:avLst/>
@@ -9593,7 +9651,7 @@
         <p:spPr>
           <a:xfrm>
             <a:off x="2462400" y="3463200"/>
-            <a:ext cx="228240" cy="228240"/>
+            <a:ext cx="227880" cy="227880"/>
           </a:xfrm>
           <a:prstGeom prst="ellipse">
             <a:avLst/>
@@ -9623,7 +9681,7 @@
         <p:spPr>
           <a:xfrm>
             <a:off x="842400" y="3643200"/>
-            <a:ext cx="228240" cy="228240"/>
+            <a:ext cx="227880" cy="227880"/>
           </a:xfrm>
           <a:prstGeom prst="ellipse">
             <a:avLst/>
@@ -9653,7 +9711,7 @@
         <p:spPr>
           <a:xfrm>
             <a:off x="1346400" y="4291200"/>
-            <a:ext cx="228240" cy="228240"/>
+            <a:ext cx="227880" cy="227880"/>
           </a:xfrm>
           <a:prstGeom prst="ellipse">
             <a:avLst/>
@@ -9683,7 +9741,7 @@
         <p:spPr>
           <a:xfrm>
             <a:off x="2971800" y="2743200"/>
-            <a:ext cx="6171840" cy="596160"/>
+            <a:ext cx="6171480" cy="595800"/>
           </a:xfrm>
           <a:prstGeom prst="rect">
             <a:avLst/>
@@ -9711,7 +9769,11 @@
             </a:pPr>
             <a:r>
               <a:rPr b="0" lang="en-US" sz="1800" spc="-1" strike="noStrike">
+                <a:solidFill>
+                  <a:srgbClr val="000000"/>
+                </a:solidFill>
                 <a:latin typeface="Times New Roman"/>
+                <a:ea typeface="DejaVu Sans"/>
               </a:rPr>
               <a:t>At der ikke er de forbindelser I måske forventede/håbede!</a:t>
             </a:r>
@@ -9730,7 +9792,7 @@
         <p:spPr>
           <a:xfrm>
             <a:off x="3886200" y="3657600"/>
-            <a:ext cx="5486040" cy="1355400"/>
+            <a:ext cx="5485680" cy="1355040"/>
           </a:xfrm>
           <a:prstGeom prst="rect">
             <a:avLst/>
@@ -9758,7 +9820,11 @@
             </a:pPr>
             <a:r>
               <a:rPr b="0" lang="en-US" sz="1800" spc="-1" strike="noStrike">
+                <a:solidFill>
+                  <a:srgbClr val="000000"/>
+                </a:solidFill>
                 <a:latin typeface="Times New Roman"/>
+                <a:ea typeface="DejaVu Sans"/>
               </a:rPr>
               <a:t>Hvad gør I så?</a:t>
             </a:r>
@@ -9784,7 +9850,11 @@
             </a:pPr>
             <a:r>
               <a:rPr b="0" lang="en-US" sz="1800" spc="-1" strike="noStrike">
+                <a:solidFill>
+                  <a:srgbClr val="000000"/>
+                </a:solidFill>
                 <a:latin typeface="Times New Roman"/>
+                <a:ea typeface="DejaVu Sans"/>
               </a:rPr>
               <a:t>1) Finder noget andet at studer.</a:t>
             </a:r>
@@ -9800,7 +9870,11 @@
             </a:pPr>
             <a:r>
               <a:rPr b="0" lang="en-US" sz="1800" spc="-1" strike="noStrike">
+                <a:solidFill>
+                  <a:srgbClr val="000000"/>
+                </a:solidFill>
                 <a:latin typeface="Times New Roman"/>
+                <a:ea typeface="DejaVu Sans"/>
               </a:rPr>
               <a:t>2) Skriver om hvor vildt det er at der ikke er det netværk, man skulle forvente.</a:t>
             </a:r>
@@ -9853,7 +9927,7 @@
         <p:spPr>
           <a:xfrm>
             <a:off x="74880" y="1251000"/>
-            <a:ext cx="1202400" cy="1490400"/>
+            <a:ext cx="1202040" cy="1490040"/>
           </a:xfrm>
           <a:prstGeom prst="rect">
             <a:avLst/>
@@ -9876,7 +9950,7 @@
         <p:spPr>
           <a:xfrm>
             <a:off x="1436400" y="1219680"/>
-            <a:ext cx="4111560" cy="188280"/>
+            <a:ext cx="4111200" cy="187920"/>
           </a:xfrm>
           <a:prstGeom prst="rect">
             <a:avLst/>
@@ -9899,7 +9973,7 @@
         <p:spPr>
           <a:xfrm>
             <a:off x="1436400" y="1407960"/>
-            <a:ext cx="2010600" cy="1333080"/>
+            <a:ext cx="2010240" cy="1332720"/>
           </a:xfrm>
           <a:prstGeom prst="rect">
             <a:avLst/>
@@ -9922,7 +9996,7 @@
         <p:spPr>
           <a:xfrm>
             <a:off x="149040" y="3083400"/>
-            <a:ext cx="2254680" cy="209880"/>
+            <a:ext cx="2254320" cy="209520"/>
           </a:xfrm>
           <a:prstGeom prst="rect">
             <a:avLst/>
@@ -9945,7 +10019,7 @@
         <p:spPr>
           <a:xfrm>
             <a:off x="154440" y="3268080"/>
-            <a:ext cx="2218320" cy="1451880"/>
+            <a:ext cx="2217960" cy="1451520"/>
           </a:xfrm>
           <a:prstGeom prst="rect">
             <a:avLst/>
@@ -9968,7 +10042,7 @@
         <p:spPr>
           <a:xfrm>
             <a:off x="2922120" y="3277080"/>
-            <a:ext cx="2329560" cy="1033920"/>
+            <a:ext cx="2329200" cy="1033560"/>
           </a:xfrm>
           <a:prstGeom prst="rect">
             <a:avLst/>
@@ -9991,7 +10065,7 @@
         <p:spPr>
           <a:xfrm>
             <a:off x="2921040" y="3068640"/>
-            <a:ext cx="2526840" cy="218520"/>
+            <a:ext cx="2526480" cy="218160"/>
           </a:xfrm>
           <a:prstGeom prst="rect">
             <a:avLst/>
@@ -10091,13 +10165,13 @@
       <p:sp>
         <p:nvSpPr>
           <p:cNvPr id="176" name=""/>
-          <p:cNvSpPr txBox="1"/>
+          <p:cNvSpPr/>
           <p:nvPr/>
         </p:nvSpPr>
         <p:spPr>
           <a:xfrm>
             <a:off x="6050880" y="1253880"/>
-            <a:ext cx="1721520" cy="346320"/>
+            <a:ext cx="1721160" cy="345960"/>
           </a:xfrm>
           <a:prstGeom prst="rect">
             <a:avLst/>
@@ -10107,11 +10181,22 @@
             <a:noFill/>
           </a:ln>
         </p:spPr>
+        <p:style>
+          <a:lnRef idx="0"/>
+          <a:fillRef idx="0"/>
+          <a:effectRef idx="0"/>
+          <a:fontRef idx="minor"/>
+        </p:style>
         <p:txBody>
           <a:bodyPr lIns="90000" rIns="90000" tIns="45000" bIns="45000">
             <a:noAutofit/>
           </a:bodyPr>
           <a:p>
+            <a:pPr>
+              <a:lnSpc>
+                <a:spcPct val="100000"/>
+              </a:lnSpc>
+            </a:pPr>
             <a:r>
               <a:rPr b="0" lang="en-US" sz="1800" spc="-1" strike="noStrike">
                 <a:solidFill>
@@ -10119,16 +10204,13 @@
                 </a:solidFill>
                 <a:latin typeface="Arial"/>
               </a:rPr>
-              <a:t>i r:</a:t>
-            </a:r>
-            <a:r>
-              <a:rPr b="0" lang="en-US" sz="1800" spc="-1" strike="noStrike">
-                <a:latin typeface="Arial"/>
-              </a:rPr>
-              <a:t>  </a:t>
+              <a:t>i r:  </a:t>
             </a:r>
             <a:r>
               <a:rPr b="0" i="1" lang="en-US" sz="1800" spc="-1" strike="noStrike">
+                <a:solidFill>
+                  <a:srgbClr val="c9211e"/>
+                </a:solidFill>
                 <a:latin typeface="Arial"/>
               </a:rPr>
               <a:t>xtabs(...)</a:t>
@@ -10148,7 +10230,7 @@
         <p:spPr>
           <a:xfrm>
             <a:off x="2117520" y="1176480"/>
-            <a:ext cx="326880" cy="285480"/>
+            <a:ext cx="326520" cy="285120"/>
           </a:xfrm>
           <a:prstGeom prst="ellipse">
             <a:avLst/>
@@ -10170,13 +10252,13 @@
       <p:sp>
         <p:nvSpPr>
           <p:cNvPr id="178" name=""/>
-          <p:cNvSpPr txBox="1"/>
+          <p:cNvSpPr/>
           <p:nvPr/>
         </p:nvSpPr>
         <p:spPr>
           <a:xfrm>
             <a:off x="149040" y="2737080"/>
-            <a:ext cx="717120" cy="602280"/>
+            <a:ext cx="716760" cy="601920"/>
           </a:xfrm>
           <a:prstGeom prst="rect">
             <a:avLst/>
@@ -10186,48 +10268,12 @@
             <a:noFill/>
           </a:ln>
         </p:spPr>
-        <p:txBody>
-          <a:bodyPr lIns="90000" rIns="90000" tIns="45000" bIns="45000">
-            <a:noAutofit/>
-          </a:bodyPr>
-          <a:p>
-            <a:r>
-              <a:rPr b="0" lang="en-US" sz="1800" spc="-1" strike="noStrike">
-                <a:latin typeface="Arial"/>
-              </a:rPr>
-              <a:t>AA</a:t>
-            </a:r>
-            <a:r>
-              <a:rPr b="0" lang="en-US" sz="1800" spc="-1" strike="noStrike" baseline="33000">
-                <a:latin typeface="Arial"/>
-              </a:rPr>
-              <a:t>T</a:t>
-            </a:r>
-            <a:endParaRPr b="0" lang="en-US" sz="1800" spc="-1" strike="noStrike">
-              <a:latin typeface="Arial"/>
-            </a:endParaRPr>
-          </a:p>
-        </p:txBody>
-      </p:sp>
-      <p:sp>
-        <p:nvSpPr>
-          <p:cNvPr id="179" name=""/>
-          <p:cNvSpPr txBox="1"/>
-          <p:nvPr/>
-        </p:nvSpPr>
-        <p:spPr>
-          <a:xfrm>
-            <a:off x="2836440" y="2716920"/>
-            <a:ext cx="717120" cy="602280"/>
-          </a:xfrm>
-          <a:prstGeom prst="rect">
-            <a:avLst/>
-          </a:prstGeom>
-          <a:noFill/>
-          <a:ln w="0">
-            <a:noFill/>
-          </a:ln>
-        </p:spPr>
+        <p:style>
+          <a:lnRef idx="0"/>
+          <a:fillRef idx="0"/>
+          <a:effectRef idx="0"/>
+          <a:fontRef idx="minor"/>
+        </p:style>
         <p:txBody>
           <a:bodyPr lIns="90000" rIns="90000" tIns="45000" bIns="45000">
             <a:noAutofit/>
@@ -10241,6 +10287,59 @@
             <a:r>
               <a:rPr b="0" lang="en-US" sz="1800" spc="-1" strike="noStrike">
                 <a:latin typeface="Arial"/>
+              </a:rPr>
+              <a:t>AA</a:t>
+            </a:r>
+            <a:r>
+              <a:rPr b="0" lang="en-US" sz="1800" spc="-1" strike="noStrike" baseline="33000">
+                <a:latin typeface="Arial"/>
+              </a:rPr>
+              <a:t>T</a:t>
+            </a:r>
+            <a:endParaRPr b="0" lang="en-US" sz="1800" spc="-1" strike="noStrike">
+              <a:latin typeface="Arial"/>
+            </a:endParaRPr>
+          </a:p>
+        </p:txBody>
+      </p:sp>
+      <p:sp>
+        <p:nvSpPr>
+          <p:cNvPr id="179" name=""/>
+          <p:cNvSpPr/>
+          <p:nvPr/>
+        </p:nvSpPr>
+        <p:spPr>
+          <a:xfrm>
+            <a:off x="2836440" y="2716920"/>
+            <a:ext cx="716760" cy="601920"/>
+          </a:xfrm>
+          <a:prstGeom prst="rect">
+            <a:avLst/>
+          </a:prstGeom>
+          <a:noFill/>
+          <a:ln w="0">
+            <a:noFill/>
+          </a:ln>
+        </p:spPr>
+        <p:style>
+          <a:lnRef idx="0"/>
+          <a:fillRef idx="0"/>
+          <a:effectRef idx="0"/>
+          <a:fontRef idx="minor"/>
+        </p:style>
+        <p:txBody>
+          <a:bodyPr lIns="90000" rIns="90000" tIns="45000" bIns="45000">
+            <a:noAutofit/>
+          </a:bodyPr>
+          <a:p>
+            <a:pPr>
+              <a:lnSpc>
+                <a:spcPct val="100000"/>
+              </a:lnSpc>
+            </a:pPr>
+            <a:r>
+              <a:rPr b="0" lang="en-US" sz="1800" spc="-1" strike="noStrike">
+                <a:latin typeface="Arial"/>
                 <a:ea typeface="Noto Sans CJK SC"/>
               </a:rPr>
               <a:t>A</a:t>
@@ -10255,6 +10354,7 @@
             <a:r>
               <a:rPr b="0" lang="en-US" sz="1800" spc="-1" strike="noStrike">
                 <a:latin typeface="Arial"/>
+                <a:ea typeface="Noto Sans CJK SC"/>
               </a:rPr>
               <a:t>A</a:t>
             </a:r>
@@ -10273,7 +10373,7 @@
         <p:spPr>
           <a:xfrm>
             <a:off x="1433880" y="3048480"/>
-            <a:ext cx="326880" cy="285480"/>
+            <a:ext cx="326520" cy="285120"/>
           </a:xfrm>
           <a:prstGeom prst="ellipse">
             <a:avLst/>
@@ -10301,7 +10401,7 @@
         <p:spPr>
           <a:xfrm>
             <a:off x="4530240" y="3012480"/>
-            <a:ext cx="326880" cy="285480"/>
+            <a:ext cx="326520" cy="285120"/>
           </a:xfrm>
           <a:prstGeom prst="ellipse">
             <a:avLst/>
@@ -10323,13 +10423,13 @@
       <p:sp>
         <p:nvSpPr>
           <p:cNvPr id="182" name=""/>
-          <p:cNvSpPr txBox="1"/>
+          <p:cNvSpPr/>
           <p:nvPr/>
         </p:nvSpPr>
         <p:spPr>
           <a:xfrm>
             <a:off x="1192680" y="2724480"/>
-            <a:ext cx="1802880" cy="602280"/>
+            <a:ext cx="1802520" cy="601920"/>
           </a:xfrm>
           <a:prstGeom prst="rect">
             <a:avLst/>
@@ -10339,42 +10439,12 @@
             <a:noFill/>
           </a:ln>
         </p:spPr>
-        <p:txBody>
-          <a:bodyPr lIns="90000" rIns="90000" tIns="45000" bIns="45000">
-            <a:noAutofit/>
-          </a:bodyPr>
-          <a:p>
-            <a:r>
-              <a:rPr b="0" i="1" lang="en-US" sz="1800" spc="-1" strike="noStrike">
-                <a:latin typeface="Arial"/>
-              </a:rPr>
-              <a:t>A %*% t(A)</a:t>
-            </a:r>
-            <a:endParaRPr b="0" lang="en-US" sz="1800" spc="-1" strike="noStrike">
-              <a:latin typeface="Arial"/>
-            </a:endParaRPr>
-          </a:p>
-        </p:txBody>
-      </p:sp>
-      <p:sp>
-        <p:nvSpPr>
-          <p:cNvPr id="183" name=""/>
-          <p:cNvSpPr txBox="1"/>
-          <p:nvPr/>
-        </p:nvSpPr>
-        <p:spPr>
-          <a:xfrm>
-            <a:off x="4561920" y="2724480"/>
-            <a:ext cx="2828880" cy="602280"/>
-          </a:xfrm>
-          <a:prstGeom prst="rect">
-            <a:avLst/>
-          </a:prstGeom>
-          <a:noFill/>
-          <a:ln w="0">
-            <a:noFill/>
-          </a:ln>
-        </p:spPr>
+        <p:style>
+          <a:lnRef idx="0"/>
+          <a:fillRef idx="0"/>
+          <a:effectRef idx="0"/>
+          <a:fontRef idx="minor"/>
+        </p:style>
         <p:txBody>
           <a:bodyPr lIns="90000" rIns="90000" tIns="45000" bIns="45000">
             <a:noAutofit/>
@@ -10388,15 +10458,8 @@
             <a:r>
               <a:rPr b="0" i="1" lang="en-US" sz="1800" spc="-1" strike="noStrike">
                 <a:latin typeface="Arial"/>
-                <a:ea typeface="Noto Sans CJK SC"/>
-              </a:rPr>
-              <a:t>t(A) %*% </a:t>
-            </a:r>
-            <a:r>
-              <a:rPr b="0" i="1" lang="en-US" sz="1800" spc="-1" strike="noStrike">
-                <a:latin typeface="Arial"/>
-              </a:rPr>
-              <a:t>A</a:t>
+              </a:rPr>
+              <a:t>A %*% t(A)</a:t>
             </a:r>
             <a:endParaRPr b="0" lang="en-US" sz="1800" spc="-1" strike="noStrike">
               <a:latin typeface="Arial"/>
@@ -10406,14 +10469,14 @@
       </p:sp>
       <p:sp>
         <p:nvSpPr>
-          <p:cNvPr id="184" name=""/>
-          <p:cNvSpPr txBox="1"/>
+          <p:cNvPr id="183" name=""/>
+          <p:cNvSpPr/>
           <p:nvPr/>
         </p:nvSpPr>
         <p:spPr>
           <a:xfrm>
-            <a:off x="6409080" y="2801520"/>
-            <a:ext cx="3775320" cy="858240"/>
+            <a:off x="4561920" y="2724480"/>
+            <a:ext cx="2828520" cy="601920"/>
           </a:xfrm>
           <a:prstGeom prst="rect">
             <a:avLst/>
@@ -10423,44 +10486,45 @@
             <a:noFill/>
           </a:ln>
         </p:spPr>
+        <p:style>
+          <a:lnRef idx="0"/>
+          <a:fillRef idx="0"/>
+          <a:effectRef idx="0"/>
+          <a:fontRef idx="minor"/>
+        </p:style>
         <p:txBody>
           <a:bodyPr lIns="90000" rIns="90000" tIns="45000" bIns="45000">
             <a:noAutofit/>
           </a:bodyPr>
           <a:p>
-            <a:r>
-              <a:rPr b="0" lang="en-US" sz="1400" spc="-1" strike="noStrike">
+            <a:pPr>
+              <a:lnSpc>
+                <a:spcPct val="100000"/>
+              </a:lnSpc>
+            </a:pPr>
+            <a:r>
+              <a:rPr b="0" i="1" lang="en-US" sz="1800" spc="-1" strike="noStrike">
                 <a:latin typeface="Arial"/>
-              </a:rPr>
-              <a:t>%*% når man ganger to matricer</a:t>
-            </a:r>
-            <a:endParaRPr b="0" lang="en-US" sz="1400" spc="-1" strike="noStrike">
-              <a:latin typeface="Arial"/>
-            </a:endParaRPr>
-          </a:p>
-          <a:p>
-            <a:r>
-              <a:rPr b="0" lang="en-US" sz="1400" spc="-1" strike="noStrike">
-                <a:latin typeface="Arial"/>
-              </a:rPr>
-              <a:t>t(..) når man tager den transponerede matrice</a:t>
-            </a:r>
-            <a:endParaRPr b="0" lang="en-US" sz="1400" spc="-1" strike="noStrike">
-              <a:latin typeface="Arial"/>
-            </a:endParaRPr>
-          </a:p>
-        </p:txBody>
-      </p:sp>
-      <p:sp>
-        <p:nvSpPr>
-          <p:cNvPr id="185" name=""/>
-          <p:cNvSpPr txBox="1"/>
+                <a:ea typeface="Noto Sans CJK SC"/>
+              </a:rPr>
+              <a:t>t(A) %*% A</a:t>
+            </a:r>
+            <a:endParaRPr b="0" lang="en-US" sz="1800" spc="-1" strike="noStrike">
+              <a:latin typeface="Arial"/>
+            </a:endParaRPr>
+          </a:p>
+        </p:txBody>
+      </p:sp>
+      <p:sp>
+        <p:nvSpPr>
+          <p:cNvPr id="184" name=""/>
+          <p:cNvSpPr/>
           <p:nvPr/>
         </p:nvSpPr>
         <p:spPr>
           <a:xfrm>
-            <a:off x="260280" y="600480"/>
-            <a:ext cx="7602120" cy="858600"/>
+            <a:off x="6409080" y="2801520"/>
+            <a:ext cx="3774960" cy="857880"/>
           </a:xfrm>
           <a:prstGeom prst="rect">
             <a:avLst/>
@@ -10470,11 +10534,85 @@
             <a:noFill/>
           </a:ln>
         </p:spPr>
+        <p:style>
+          <a:lnRef idx="0"/>
+          <a:fillRef idx="0"/>
+          <a:effectRef idx="0"/>
+          <a:fontRef idx="minor"/>
+        </p:style>
         <p:txBody>
           <a:bodyPr lIns="90000" rIns="90000" tIns="45000" bIns="45000">
             <a:noAutofit/>
           </a:bodyPr>
           <a:p>
+            <a:pPr>
+              <a:lnSpc>
+                <a:spcPct val="100000"/>
+              </a:lnSpc>
+            </a:pPr>
+            <a:r>
+              <a:rPr b="0" lang="en-US" sz="1400" spc="-1" strike="noStrike">
+                <a:latin typeface="Arial"/>
+              </a:rPr>
+              <a:t>%*% når man ganger to matricer</a:t>
+            </a:r>
+            <a:endParaRPr b="0" lang="en-US" sz="1400" spc="-1" strike="noStrike">
+              <a:latin typeface="Arial"/>
+            </a:endParaRPr>
+          </a:p>
+          <a:p>
+            <a:pPr>
+              <a:lnSpc>
+                <a:spcPct val="100000"/>
+              </a:lnSpc>
+            </a:pPr>
+            <a:r>
+              <a:rPr b="0" lang="en-US" sz="1400" spc="-1" strike="noStrike">
+                <a:latin typeface="Arial"/>
+              </a:rPr>
+              <a:t>t(..) når man tager den transponerede matrice</a:t>
+            </a:r>
+            <a:endParaRPr b="0" lang="en-US" sz="1400" spc="-1" strike="noStrike">
+              <a:latin typeface="Arial"/>
+            </a:endParaRPr>
+          </a:p>
+        </p:txBody>
+      </p:sp>
+      <p:sp>
+        <p:nvSpPr>
+          <p:cNvPr id="185" name=""/>
+          <p:cNvSpPr/>
+          <p:nvPr/>
+        </p:nvSpPr>
+        <p:spPr>
+          <a:xfrm>
+            <a:off x="260280" y="600480"/>
+            <a:ext cx="7601760" cy="858240"/>
+          </a:xfrm>
+          <a:prstGeom prst="rect">
+            <a:avLst/>
+          </a:prstGeom>
+          <a:noFill/>
+          <a:ln w="0">
+            <a:noFill/>
+          </a:ln>
+        </p:spPr>
+        <p:style>
+          <a:lnRef idx="0"/>
+          <a:fillRef idx="0"/>
+          <a:effectRef idx="0"/>
+          <a:fontRef idx="minor"/>
+        </p:style>
+        <p:txBody>
+          <a:bodyPr lIns="90000" rIns="90000" tIns="45000" bIns="45000">
+            <a:noAutofit/>
+          </a:bodyPr>
+          <a:p>
+            <a:pPr>
+              <a:lnSpc>
+                <a:spcPct val="100000"/>
+              </a:lnSpc>
+            </a:pPr>
             <a:r>
               <a:rPr b="1" lang="en-US" sz="2400" spc="-1" strike="noStrike">
                 <a:solidFill>
@@ -10494,13 +10632,13 @@
       <p:sp>
         <p:nvSpPr>
           <p:cNvPr id="186" name=""/>
-          <p:cNvSpPr txBox="1"/>
+          <p:cNvSpPr/>
           <p:nvPr/>
         </p:nvSpPr>
         <p:spPr>
           <a:xfrm>
             <a:off x="3413160" y="1770480"/>
-            <a:ext cx="2406960" cy="602280"/>
+            <a:ext cx="2406600" cy="601920"/>
           </a:xfrm>
           <a:prstGeom prst="rect">
             <a:avLst/>
@@ -10510,11 +10648,22 @@
             <a:noFill/>
           </a:ln>
         </p:spPr>
+        <p:style>
+          <a:lnRef idx="0"/>
+          <a:fillRef idx="0"/>
+          <a:effectRef idx="0"/>
+          <a:fontRef idx="minor"/>
+        </p:style>
         <p:txBody>
           <a:bodyPr lIns="90000" rIns="90000" tIns="45000" bIns="45000">
             <a:noAutofit/>
           </a:bodyPr>
           <a:p>
+            <a:pPr>
+              <a:lnSpc>
+                <a:spcPct val="100000"/>
+              </a:lnSpc>
+            </a:pPr>
             <a:r>
               <a:rPr b="0" lang="en-US" sz="1200" spc="-1" strike="noStrike">
                 <a:solidFill>
@@ -10538,8 +10687,16 @@
             </a:endParaRPr>
           </a:p>
           <a:p>
+            <a:pPr>
+              <a:lnSpc>
+                <a:spcPct val="100000"/>
+              </a:lnSpc>
+            </a:pPr>
             <a:r>
               <a:rPr b="0" lang="en-US" sz="1200" spc="-1" strike="noStrike">
+                <a:solidFill>
+                  <a:srgbClr val="c9211e"/>
+                </a:solidFill>
                 <a:latin typeface="Arial"/>
               </a:rPr>
               <a:t>(name x affiliation)</a:t>
@@ -10553,13 +10710,13 @@
       <p:sp>
         <p:nvSpPr>
           <p:cNvPr id="187" name=""/>
-          <p:cNvSpPr txBox="1"/>
+          <p:cNvSpPr/>
           <p:nvPr/>
         </p:nvSpPr>
         <p:spPr>
           <a:xfrm>
             <a:off x="153000" y="4713120"/>
-            <a:ext cx="3766680" cy="459000"/>
+            <a:ext cx="3766320" cy="458640"/>
           </a:xfrm>
           <a:prstGeom prst="rect">
             <a:avLst/>
@@ -10569,11 +10726,22 @@
             <a:noFill/>
           </a:ln>
         </p:spPr>
+        <p:style>
+          <a:lnRef idx="0"/>
+          <a:fillRef idx="0"/>
+          <a:effectRef idx="0"/>
+          <a:fontRef idx="minor"/>
+        </p:style>
         <p:txBody>
           <a:bodyPr lIns="90000" rIns="90000" tIns="45000" bIns="45000">
             <a:noAutofit/>
           </a:bodyPr>
           <a:p>
+            <a:pPr>
+              <a:lnSpc>
+                <a:spcPct val="100000"/>
+              </a:lnSpc>
+            </a:pPr>
             <a:r>
               <a:rPr b="0" lang="en-US" sz="1300" spc="-1" strike="noStrike">
                 <a:solidFill>
@@ -10597,8 +10765,16 @@
             </a:endParaRPr>
           </a:p>
           <a:p>
+            <a:pPr>
+              <a:lnSpc>
+                <a:spcPct val="100000"/>
+              </a:lnSpc>
+            </a:pPr>
             <a:r>
               <a:rPr b="0" lang="en-US" sz="1300" spc="-1" strike="noStrike">
+                <a:solidFill>
+                  <a:srgbClr val="c9211e"/>
+                </a:solidFill>
                 <a:latin typeface="Arial"/>
               </a:rPr>
               <a:t>(name x name)</a:t>
@@ -10612,13 +10788,13 @@
       <p:sp>
         <p:nvSpPr>
           <p:cNvPr id="188" name=""/>
-          <p:cNvSpPr txBox="1"/>
+          <p:cNvSpPr/>
           <p:nvPr/>
         </p:nvSpPr>
         <p:spPr>
           <a:xfrm>
             <a:off x="2937600" y="4368240"/>
-            <a:ext cx="4372200" cy="431640"/>
+            <a:ext cx="4371840" cy="431280"/>
           </a:xfrm>
           <a:prstGeom prst="rect">
             <a:avLst/>
@@ -10628,11 +10804,22 @@
             <a:noFill/>
           </a:ln>
         </p:spPr>
+        <p:style>
+          <a:lnRef idx="0"/>
+          <a:fillRef idx="0"/>
+          <a:effectRef idx="0"/>
+          <a:fontRef idx="minor"/>
+        </p:style>
         <p:txBody>
           <a:bodyPr lIns="90000" rIns="90000" tIns="45000" bIns="45000">
             <a:noAutofit/>
           </a:bodyPr>
           <a:p>
+            <a:pPr>
+              <a:lnSpc>
+                <a:spcPct val="100000"/>
+              </a:lnSpc>
+            </a:pPr>
             <a:r>
               <a:rPr b="0" lang="en-US" sz="1200" spc="-1" strike="noStrike">
                 <a:solidFill>
@@ -10656,42 +10843,11 @@
             </a:endParaRPr>
           </a:p>
           <a:p>
-            <a:r>
-              <a:rPr b="0" lang="en-US" sz="1200" spc="-1" strike="noStrike">
-                <a:latin typeface="Arial"/>
-              </a:rPr>
-              <a:t>(affiliation x affiliation)</a:t>
-            </a:r>
-            <a:endParaRPr b="0" lang="en-US" sz="1200" spc="-1" strike="noStrike">
-              <a:latin typeface="Arial"/>
-            </a:endParaRPr>
-          </a:p>
-        </p:txBody>
-      </p:sp>
-      <p:sp>
-        <p:nvSpPr>
-          <p:cNvPr id="189" name=""/>
-          <p:cNvSpPr txBox="1"/>
-          <p:nvPr/>
-        </p:nvSpPr>
-        <p:spPr>
-          <a:xfrm>
-            <a:off x="8640" y="1035000"/>
-            <a:ext cx="1887840" cy="261000"/>
-          </a:xfrm>
-          <a:prstGeom prst="rect">
-            <a:avLst/>
-          </a:prstGeom>
-          <a:noFill/>
-          <a:ln w="0">
-            <a:noFill/>
-          </a:ln>
-        </p:spPr>
-        <p:txBody>
-          <a:bodyPr lIns="90000" rIns="90000" tIns="45000" bIns="45000">
-            <a:noAutofit/>
-          </a:bodyPr>
-          <a:p>
+            <a:pPr>
+              <a:lnSpc>
+                <a:spcPct val="100000"/>
+              </a:lnSpc>
+            </a:pPr>
             <a:r>
               <a:rPr b="0" lang="en-US" sz="1200" spc="-1" strike="noStrike">
                 <a:solidFill>
@@ -10699,12 +10855,59 @@
                 </a:solidFill>
                 <a:latin typeface="Arial"/>
               </a:rPr>
+              <a:t>(affiliation x affiliation)</a:t>
+            </a:r>
+            <a:endParaRPr b="0" lang="en-US" sz="1200" spc="-1" strike="noStrike">
+              <a:latin typeface="Arial"/>
+            </a:endParaRPr>
+          </a:p>
+        </p:txBody>
+      </p:sp>
+      <p:sp>
+        <p:nvSpPr>
+          <p:cNvPr id="189" name=""/>
+          <p:cNvSpPr/>
+          <p:nvPr/>
+        </p:nvSpPr>
+        <p:spPr>
+          <a:xfrm>
+            <a:off x="8640" y="1035000"/>
+            <a:ext cx="1887480" cy="260640"/>
+          </a:xfrm>
+          <a:prstGeom prst="rect">
+            <a:avLst/>
+          </a:prstGeom>
+          <a:noFill/>
+          <a:ln w="0">
+            <a:noFill/>
+          </a:ln>
+        </p:spPr>
+        <p:style>
+          <a:lnRef idx="0"/>
+          <a:fillRef idx="0"/>
+          <a:effectRef idx="0"/>
+          <a:fontRef idx="minor"/>
+        </p:style>
+        <p:txBody>
+          <a:bodyPr lIns="90000" rIns="90000" tIns="45000" bIns="45000">
+            <a:noAutofit/>
+          </a:bodyPr>
+          <a:p>
+            <a:pPr>
+              <a:lnSpc>
+                <a:spcPct val="100000"/>
+              </a:lnSpc>
+            </a:pPr>
+            <a:r>
+              <a:rPr b="0" lang="en-US" sz="1200" spc="-1" strike="noStrike">
+                <a:solidFill>
+                  <a:srgbClr val="c9211e"/>
+                </a:solidFill>
+                <a:latin typeface="Arial"/>
+              </a:rPr>
               <a:t>medlemsliste</a:t>
             </a:r>
             <a:endParaRPr b="0" lang="en-US" sz="1200" spc="-1" strike="noStrike">
-              <a:solidFill>
-                <a:srgbClr val="c9211e"/>
-              </a:solidFill>
               <a:latin typeface="Arial"/>
             </a:endParaRPr>
           </a:p>
@@ -10724,7 +10927,7 @@
         <p:spPr>
           <a:xfrm>
             <a:off x="5654520" y="4362840"/>
-            <a:ext cx="4385160" cy="546480"/>
+            <a:ext cx="4384800" cy="546120"/>
           </a:xfrm>
           <a:prstGeom prst="rect">
             <a:avLst/>
@@ -10737,13 +10940,13 @@
       <p:sp>
         <p:nvSpPr>
           <p:cNvPr id="191" name=""/>
-          <p:cNvSpPr txBox="1"/>
+          <p:cNvSpPr/>
           <p:nvPr/>
         </p:nvSpPr>
         <p:spPr>
           <a:xfrm>
             <a:off x="6702120" y="3931200"/>
-            <a:ext cx="3099960" cy="346320"/>
+            <a:ext cx="3099600" cy="345960"/>
           </a:xfrm>
           <a:prstGeom prst="rect">
             <a:avLst/>
@@ -10753,11 +10956,22 @@
             <a:noFill/>
           </a:ln>
         </p:spPr>
+        <p:style>
+          <a:lnRef idx="0"/>
+          <a:fillRef idx="0"/>
+          <a:effectRef idx="0"/>
+          <a:fontRef idx="minor"/>
+        </p:style>
         <p:txBody>
           <a:bodyPr lIns="90000" rIns="90000" tIns="45000" bIns="45000">
             <a:noAutofit/>
           </a:bodyPr>
           <a:p>
+            <a:pPr>
+              <a:lnSpc>
+                <a:spcPct val="100000"/>
+              </a:lnSpc>
+            </a:pPr>
             <a:r>
               <a:rPr b="0" lang="en-US" sz="1800" spc="-1" strike="noStrike">
                 <a:latin typeface="Arial"/>
@@ -10809,7 +11023,7 @@
         <p:spPr>
           <a:xfrm>
             <a:off x="360000" y="270000"/>
-            <a:ext cx="9359280" cy="719280"/>
+            <a:ext cx="9358920" cy="718920"/>
           </a:xfrm>
           <a:prstGeom prst="rect">
             <a:avLst/>
@@ -10835,7 +11049,7 @@
         <p:spPr>
           <a:xfrm>
             <a:off x="360000" y="1350000"/>
-            <a:ext cx="9179280" cy="3509280"/>
+            <a:ext cx="9178920" cy="3508920"/>
           </a:xfrm>
           <a:prstGeom prst="rect">
             <a:avLst/>
@@ -10861,7 +11075,7 @@
         <p:spPr>
           <a:xfrm>
             <a:off x="360000" y="270000"/>
-            <a:ext cx="9359280" cy="719280"/>
+            <a:ext cx="9358920" cy="718920"/>
           </a:xfrm>
           <a:prstGeom prst="rect">
             <a:avLst/>
@@ -10912,7 +11126,7 @@
         <p:spPr>
           <a:xfrm>
             <a:off x="1737000" y="1545480"/>
-            <a:ext cx="3287160" cy="343080"/>
+            <a:ext cx="3286800" cy="342720"/>
           </a:xfrm>
           <a:prstGeom prst="rect">
             <a:avLst/>
@@ -10944,6 +11158,7 @@
                   <a:srgbClr val="808080"/>
                 </a:solidFill>
                 <a:latin typeface="Times New Roman"/>
+                <a:ea typeface="DejaVu Sans"/>
               </a:rPr>
               <a:t>graph_from_biadjacency_matrix(  )</a:t>
             </a:r>
@@ -10962,7 +11177,7 @@
         <p:spPr>
           <a:xfrm>
             <a:off x="1773000" y="2985480"/>
-            <a:ext cx="2828160" cy="343080"/>
+            <a:ext cx="2827800" cy="342720"/>
           </a:xfrm>
           <a:prstGeom prst="rect">
             <a:avLst/>
@@ -10994,6 +11209,7 @@
                   <a:srgbClr val="808080"/>
                 </a:solidFill>
                 <a:latin typeface="Times New Roman"/>
+                <a:ea typeface="DejaVu Sans"/>
               </a:rPr>
               <a:t>graph_from_adjacency_matrix(  )</a:t>
             </a:r>
@@ -11012,7 +11228,7 @@
         <p:spPr>
           <a:xfrm>
             <a:off x="1809000" y="4101480"/>
-            <a:ext cx="2784960" cy="343080"/>
+            <a:ext cx="2784600" cy="342720"/>
           </a:xfrm>
           <a:prstGeom prst="rect">
             <a:avLst/>
@@ -11044,6 +11260,7 @@
                   <a:srgbClr val="808080"/>
                 </a:solidFill>
                 <a:latin typeface="Times New Roman"/>
+                <a:ea typeface="DejaVu Sans"/>
               </a:rPr>
               <a:t>graph_from_adjacency_matrix(  )</a:t>
             </a:r>
@@ -11056,13 +11273,13 @@
       <p:sp>
         <p:nvSpPr>
           <p:cNvPr id="198" name=""/>
-          <p:cNvSpPr txBox="1"/>
+          <p:cNvSpPr/>
           <p:nvPr/>
         </p:nvSpPr>
         <p:spPr>
           <a:xfrm>
             <a:off x="0" y="1618920"/>
-            <a:ext cx="1697400" cy="459000"/>
+            <a:ext cx="1697040" cy="458640"/>
           </a:xfrm>
           <a:prstGeom prst="rect">
             <a:avLst/>
@@ -11072,11 +11289,22 @@
             <a:noFill/>
           </a:ln>
         </p:spPr>
+        <p:style>
+          <a:lnRef idx="0"/>
+          <a:fillRef idx="0"/>
+          <a:effectRef idx="0"/>
+          <a:fontRef idx="minor"/>
+        </p:style>
         <p:txBody>
           <a:bodyPr lIns="90000" rIns="90000" tIns="45000" bIns="45000">
             <a:noAutofit/>
           </a:bodyPr>
           <a:p>
+            <a:pPr>
+              <a:lnSpc>
+                <a:spcPct val="100000"/>
+              </a:lnSpc>
+            </a:pPr>
             <a:r>
               <a:rPr b="0" lang="en-US" sz="1300" spc="-1" strike="noStrike">
                 <a:latin typeface="Arial"/>
@@ -11092,13 +11320,13 @@
       <p:sp>
         <p:nvSpPr>
           <p:cNvPr id="199" name=""/>
-          <p:cNvSpPr txBox="1"/>
+          <p:cNvSpPr/>
           <p:nvPr/>
         </p:nvSpPr>
         <p:spPr>
           <a:xfrm>
             <a:off x="1116720" y="1618920"/>
-            <a:ext cx="658080" cy="274680"/>
+            <a:ext cx="657720" cy="274320"/>
           </a:xfrm>
           <a:prstGeom prst="rect">
             <a:avLst/>
@@ -11108,11 +11336,22 @@
             <a:noFill/>
           </a:ln>
         </p:spPr>
+        <p:style>
+          <a:lnRef idx="0"/>
+          <a:fillRef idx="0"/>
+          <a:effectRef idx="0"/>
+          <a:fontRef idx="minor"/>
+        </p:style>
         <p:txBody>
           <a:bodyPr lIns="90000" rIns="90000" tIns="45000" bIns="45000">
             <a:noAutofit/>
           </a:bodyPr>
           <a:p>
+            <a:pPr>
+              <a:lnSpc>
+                <a:spcPct val="100000"/>
+              </a:lnSpc>
+            </a:pPr>
             <a:r>
               <a:rPr b="0" lang="en-US" sz="1300" spc="-1" strike="noStrike">
                 <a:latin typeface="Arial"/>
@@ -11146,13 +11385,13 @@
       <p:sp>
         <p:nvSpPr>
           <p:cNvPr id="200" name=""/>
-          <p:cNvSpPr txBox="1"/>
+          <p:cNvSpPr/>
           <p:nvPr/>
         </p:nvSpPr>
         <p:spPr>
           <a:xfrm>
             <a:off x="360" y="2987280"/>
-            <a:ext cx="1697400" cy="459000"/>
+            <a:ext cx="1697040" cy="458640"/>
           </a:xfrm>
           <a:prstGeom prst="rect">
             <a:avLst/>
@@ -11162,11 +11401,22 @@
             <a:noFill/>
           </a:ln>
         </p:spPr>
+        <p:style>
+          <a:lnRef idx="0"/>
+          <a:fillRef idx="0"/>
+          <a:effectRef idx="0"/>
+          <a:fontRef idx="minor"/>
+        </p:style>
         <p:txBody>
           <a:bodyPr lIns="90000" rIns="90000" tIns="45000" bIns="45000">
             <a:noAutofit/>
           </a:bodyPr>
           <a:p>
+            <a:pPr>
+              <a:lnSpc>
+                <a:spcPct val="100000"/>
+              </a:lnSpc>
+            </a:pPr>
             <a:r>
               <a:rPr b="0" lang="en-US" sz="1300" spc="-1" strike="noStrike">
                 <a:latin typeface="Arial"/>
@@ -11182,13 +11432,13 @@
       <p:sp>
         <p:nvSpPr>
           <p:cNvPr id="201" name=""/>
-          <p:cNvSpPr txBox="1"/>
+          <p:cNvSpPr/>
           <p:nvPr/>
         </p:nvSpPr>
         <p:spPr>
           <a:xfrm>
             <a:off x="1116720" y="2994840"/>
-            <a:ext cx="718560" cy="296640"/>
+            <a:ext cx="718200" cy="296280"/>
           </a:xfrm>
           <a:prstGeom prst="rect">
             <a:avLst/>
@@ -11198,11 +11448,22 @@
             <a:noFill/>
           </a:ln>
         </p:spPr>
+        <p:style>
+          <a:lnRef idx="0"/>
+          <a:fillRef idx="0"/>
+          <a:effectRef idx="0"/>
+          <a:fontRef idx="minor"/>
+        </p:style>
         <p:txBody>
           <a:bodyPr lIns="90000" rIns="90000" tIns="45000" bIns="45000">
             <a:noAutofit/>
           </a:bodyPr>
           <a:p>
+            <a:pPr>
+              <a:lnSpc>
+                <a:spcPct val="100000"/>
+              </a:lnSpc>
+            </a:pPr>
             <a:r>
               <a:rPr b="0" lang="en-US" sz="1300" spc="-1" strike="noStrike">
                 <a:latin typeface="Arial"/>
@@ -11227,13 +11488,13 @@
       <p:sp>
         <p:nvSpPr>
           <p:cNvPr id="202" name=""/>
-          <p:cNvSpPr txBox="1"/>
+          <p:cNvSpPr/>
           <p:nvPr/>
         </p:nvSpPr>
         <p:spPr>
           <a:xfrm>
             <a:off x="720" y="4139640"/>
-            <a:ext cx="1697400" cy="459000"/>
+            <a:ext cx="1697040" cy="458640"/>
           </a:xfrm>
           <a:prstGeom prst="rect">
             <a:avLst/>
@@ -11243,11 +11504,22 @@
             <a:noFill/>
           </a:ln>
         </p:spPr>
+        <p:style>
+          <a:lnRef idx="0"/>
+          <a:fillRef idx="0"/>
+          <a:effectRef idx="0"/>
+          <a:fontRef idx="minor"/>
+        </p:style>
         <p:txBody>
           <a:bodyPr lIns="90000" rIns="90000" tIns="45000" bIns="45000">
             <a:noAutofit/>
           </a:bodyPr>
           <a:p>
+            <a:pPr>
+              <a:lnSpc>
+                <a:spcPct val="100000"/>
+              </a:lnSpc>
+            </a:pPr>
             <a:r>
               <a:rPr b="0" lang="en-US" sz="1300" spc="-1" strike="noStrike">
                 <a:latin typeface="Arial"/>
@@ -11263,13 +11535,13 @@
       <p:sp>
         <p:nvSpPr>
           <p:cNvPr id="203" name=""/>
-          <p:cNvSpPr txBox="1"/>
+          <p:cNvSpPr/>
           <p:nvPr/>
         </p:nvSpPr>
         <p:spPr>
           <a:xfrm>
             <a:off x="1117080" y="4147200"/>
-            <a:ext cx="822240" cy="459000"/>
+            <a:ext cx="821880" cy="458640"/>
           </a:xfrm>
           <a:prstGeom prst="rect">
             <a:avLst/>
@@ -11279,11 +11551,22 @@
             <a:noFill/>
           </a:ln>
         </p:spPr>
+        <p:style>
+          <a:lnRef idx="0"/>
+          <a:fillRef idx="0"/>
+          <a:effectRef idx="0"/>
+          <a:fontRef idx="minor"/>
+        </p:style>
         <p:txBody>
           <a:bodyPr lIns="90000" rIns="90000" tIns="45000" bIns="45000">
             <a:noAutofit/>
           </a:bodyPr>
           <a:p>
+            <a:pPr>
+              <a:lnSpc>
+                <a:spcPct val="100000"/>
+              </a:lnSpc>
+            </a:pPr>
             <a:r>
               <a:rPr b="0" lang="en-US" sz="1300" spc="-1" strike="noStrike">
                 <a:latin typeface="Arial"/>
@@ -11308,13 +11591,13 @@
       <p:sp>
         <p:nvSpPr>
           <p:cNvPr id="204" name=""/>
-          <p:cNvSpPr txBox="1"/>
+          <p:cNvSpPr/>
           <p:nvPr/>
         </p:nvSpPr>
         <p:spPr>
           <a:xfrm>
             <a:off x="360" y="1187280"/>
-            <a:ext cx="1697400" cy="459000"/>
+            <a:ext cx="1697040" cy="458640"/>
           </a:xfrm>
           <a:prstGeom prst="rect">
             <a:avLst/>
@@ -11324,127 +11607,12 @@
             <a:noFill/>
           </a:ln>
         </p:spPr>
-        <p:txBody>
-          <a:bodyPr lIns="90000" rIns="90000" tIns="45000" bIns="45000">
-            <a:noAutofit/>
-          </a:bodyPr>
-          <a:p>
-            <a:r>
-              <a:rPr b="0" lang="en-US" sz="1300" spc="-1" strike="noStrike" u="sng">
-                <a:uFillTx/>
-                <a:latin typeface="Arial"/>
-              </a:rPr>
-              <a:t>Netværksmatricer:</a:t>
-            </a:r>
-            <a:endParaRPr b="0" lang="en-US" sz="1300" spc="-1" strike="noStrike" u="sng">
-              <a:uFillTx/>
-              <a:latin typeface="Arial"/>
-            </a:endParaRPr>
-          </a:p>
-        </p:txBody>
-      </p:sp>
-      <p:sp>
-        <p:nvSpPr>
-          <p:cNvPr id="205" name=""/>
-          <p:cNvSpPr txBox="1"/>
-          <p:nvPr/>
-        </p:nvSpPr>
-        <p:spPr>
-          <a:xfrm>
-            <a:off x="1944720" y="1187640"/>
-            <a:ext cx="1697400" cy="459000"/>
-          </a:xfrm>
-          <a:prstGeom prst="rect">
-            <a:avLst/>
-          </a:prstGeom>
-          <a:noFill/>
-          <a:ln w="0">
-            <a:noFill/>
-          </a:ln>
-        </p:spPr>
-        <p:txBody>
-          <a:bodyPr lIns="90000" rIns="90000" tIns="45000" bIns="45000">
-            <a:noAutofit/>
-          </a:bodyPr>
-          <a:p>
-            <a:r>
-              <a:rPr b="1" lang="en-US" sz="1300" spc="-1" strike="noStrike" u="sng">
-                <a:uFillTx/>
-                <a:latin typeface="Arial"/>
-              </a:rPr>
-              <a:t>Igraph</a:t>
-            </a:r>
-            <a:r>
-              <a:rPr b="0" lang="en-US" sz="1300" spc="-1" strike="noStrike" u="sng">
-                <a:uFillTx/>
-                <a:latin typeface="Arial"/>
-              </a:rPr>
-              <a:t>-funktioner:</a:t>
-            </a:r>
-            <a:endParaRPr b="0" lang="en-US" sz="1300" spc="-1" strike="noStrike" u="sng">
-              <a:uFillTx/>
-              <a:latin typeface="Arial"/>
-            </a:endParaRPr>
-          </a:p>
-        </p:txBody>
-      </p:sp>
-      <p:sp>
-        <p:nvSpPr>
-          <p:cNvPr id="206" name=""/>
-          <p:cNvSpPr txBox="1"/>
-          <p:nvPr/>
-        </p:nvSpPr>
-        <p:spPr>
-          <a:xfrm>
-            <a:off x="4717080" y="1188000"/>
-            <a:ext cx="1173600" cy="459000"/>
-          </a:xfrm>
-          <a:prstGeom prst="rect">
-            <a:avLst/>
-          </a:prstGeom>
-          <a:noFill/>
-          <a:ln w="0">
-            <a:noFill/>
-          </a:ln>
-        </p:spPr>
-        <p:txBody>
-          <a:bodyPr lIns="90000" rIns="90000" tIns="45000" bIns="45000">
-            <a:noAutofit/>
-          </a:bodyPr>
-          <a:p>
-            <a:r>
-              <a:rPr b="0" lang="en-US" sz="1300" spc="-1" strike="noStrike" u="sng">
-                <a:uFillTx/>
-                <a:latin typeface="Arial"/>
-              </a:rPr>
-              <a:t>graf-objekter:</a:t>
-            </a:r>
-            <a:endParaRPr b="0" lang="en-US" sz="1300" spc="-1" strike="noStrike" u="sng">
-              <a:uFillTx/>
-              <a:latin typeface="Arial"/>
-            </a:endParaRPr>
-          </a:p>
-        </p:txBody>
-      </p:sp>
-      <p:sp>
-        <p:nvSpPr>
-          <p:cNvPr id="207" name=""/>
-          <p:cNvSpPr txBox="1"/>
-          <p:nvPr/>
-        </p:nvSpPr>
-        <p:spPr>
-          <a:xfrm>
-            <a:off x="4983480" y="1584360"/>
-            <a:ext cx="658080" cy="274680"/>
-          </a:xfrm>
-          <a:prstGeom prst="rect">
-            <a:avLst/>
-          </a:prstGeom>
-          <a:noFill/>
-          <a:ln w="0">
-            <a:noFill/>
-          </a:ln>
-        </p:spPr>
+        <p:style>
+          <a:lnRef idx="0"/>
+          <a:fillRef idx="0"/>
+          <a:effectRef idx="0"/>
+          <a:fontRef idx="minor"/>
+        </p:style>
         <p:txBody>
           <a:bodyPr lIns="90000" rIns="90000" tIns="45000" bIns="45000">
             <a:noAutofit/>
@@ -11456,6 +11624,157 @@
               </a:lnSpc>
             </a:pPr>
             <a:r>
+              <a:rPr b="0" lang="en-US" sz="1300" spc="-1" strike="noStrike" u="sng">
+                <a:uFillTx/>
+                <a:latin typeface="Arial"/>
+              </a:rPr>
+              <a:t>Netværksmatricer:</a:t>
+            </a:r>
+            <a:endParaRPr b="0" lang="en-US" sz="1300" spc="-1" strike="noStrike">
+              <a:latin typeface="Arial"/>
+            </a:endParaRPr>
+          </a:p>
+        </p:txBody>
+      </p:sp>
+      <p:sp>
+        <p:nvSpPr>
+          <p:cNvPr id="205" name=""/>
+          <p:cNvSpPr/>
+          <p:nvPr/>
+        </p:nvSpPr>
+        <p:spPr>
+          <a:xfrm>
+            <a:off x="1944720" y="1187640"/>
+            <a:ext cx="1697040" cy="458640"/>
+          </a:xfrm>
+          <a:prstGeom prst="rect">
+            <a:avLst/>
+          </a:prstGeom>
+          <a:noFill/>
+          <a:ln w="0">
+            <a:noFill/>
+          </a:ln>
+        </p:spPr>
+        <p:style>
+          <a:lnRef idx="0"/>
+          <a:fillRef idx="0"/>
+          <a:effectRef idx="0"/>
+          <a:fontRef idx="minor"/>
+        </p:style>
+        <p:txBody>
+          <a:bodyPr lIns="90000" rIns="90000" tIns="45000" bIns="45000">
+            <a:noAutofit/>
+          </a:bodyPr>
+          <a:p>
+            <a:pPr>
+              <a:lnSpc>
+                <a:spcPct val="100000"/>
+              </a:lnSpc>
+            </a:pPr>
+            <a:r>
+              <a:rPr b="1" lang="en-US" sz="1300" spc="-1" strike="noStrike" u="sng">
+                <a:uFillTx/>
+                <a:latin typeface="Arial"/>
+              </a:rPr>
+              <a:t>Igraph</a:t>
+            </a:r>
+            <a:r>
+              <a:rPr b="0" lang="en-US" sz="1300" spc="-1" strike="noStrike" u="sng">
+                <a:uFillTx/>
+                <a:latin typeface="Arial"/>
+              </a:rPr>
+              <a:t>-funktioner:</a:t>
+            </a:r>
+            <a:endParaRPr b="0" lang="en-US" sz="1300" spc="-1" strike="noStrike">
+              <a:latin typeface="Arial"/>
+            </a:endParaRPr>
+          </a:p>
+        </p:txBody>
+      </p:sp>
+      <p:sp>
+        <p:nvSpPr>
+          <p:cNvPr id="206" name=""/>
+          <p:cNvSpPr/>
+          <p:nvPr/>
+        </p:nvSpPr>
+        <p:spPr>
+          <a:xfrm>
+            <a:off x="4717080" y="1188000"/>
+            <a:ext cx="1173240" cy="458640"/>
+          </a:xfrm>
+          <a:prstGeom prst="rect">
+            <a:avLst/>
+          </a:prstGeom>
+          <a:noFill/>
+          <a:ln w="0">
+            <a:noFill/>
+          </a:ln>
+        </p:spPr>
+        <p:style>
+          <a:lnRef idx="0"/>
+          <a:fillRef idx="0"/>
+          <a:effectRef idx="0"/>
+          <a:fontRef idx="minor"/>
+        </p:style>
+        <p:txBody>
+          <a:bodyPr lIns="90000" rIns="90000" tIns="45000" bIns="45000">
+            <a:noAutofit/>
+          </a:bodyPr>
+          <a:p>
+            <a:pPr>
+              <a:lnSpc>
+                <a:spcPct val="100000"/>
+              </a:lnSpc>
+            </a:pPr>
+            <a:r>
+              <a:rPr b="0" lang="en-US" sz="1300" spc="-1" strike="noStrike" u="sng">
+                <a:uFillTx/>
+                <a:latin typeface="Arial"/>
+              </a:rPr>
+              <a:t>graf-objekter:</a:t>
+            </a:r>
+            <a:endParaRPr b="0" lang="en-US" sz="1300" spc="-1" strike="noStrike">
+              <a:latin typeface="Arial"/>
+            </a:endParaRPr>
+          </a:p>
+        </p:txBody>
+      </p:sp>
+      <p:sp>
+        <p:nvSpPr>
+          <p:cNvPr id="207" name=""/>
+          <p:cNvSpPr/>
+          <p:nvPr/>
+        </p:nvSpPr>
+        <p:spPr>
+          <a:xfrm>
+            <a:off x="4983480" y="1584360"/>
+            <a:ext cx="657720" cy="274320"/>
+          </a:xfrm>
+          <a:prstGeom prst="rect">
+            <a:avLst/>
+          </a:prstGeom>
+          <a:noFill/>
+          <a:ln w="0">
+            <a:noFill/>
+          </a:ln>
+        </p:spPr>
+        <p:style>
+          <a:lnRef idx="0"/>
+          <a:fillRef idx="0"/>
+          <a:effectRef idx="0"/>
+          <a:fontRef idx="minor"/>
+        </p:style>
+        <p:txBody>
+          <a:bodyPr lIns="90000" rIns="90000" tIns="45000" bIns="45000">
+            <a:noAutofit/>
+          </a:bodyPr>
+          <a:p>
+            <a:pPr>
+              <a:lnSpc>
+                <a:spcPct val="100000"/>
+              </a:lnSpc>
+            </a:pPr>
+            <a:r>
               <a:rPr b="0" lang="en-US" sz="1300" spc="-1" strike="noStrike">
                 <a:latin typeface="Arial"/>
                 <a:ea typeface="Noto Sans CJK SC"/>
@@ -11468,6 +11787,7 @@
                   <a:srgbClr val="ff972f"/>
                 </a:solidFill>
                 <a:latin typeface="Arial"/>
+                <a:ea typeface="Noto Sans CJK SC"/>
               </a:rPr>
               <a:t>b</a:t>
             </a:r>
@@ -11477,6 +11797,7 @@
                   <a:srgbClr val="729fcf"/>
                 </a:solidFill>
                 <a:latin typeface="Arial"/>
+                <a:ea typeface="Noto Sans CJK SC"/>
               </a:rPr>
               <a:t>i</a:t>
             </a:r>
@@ -11489,13 +11810,13 @@
       <p:sp>
         <p:nvSpPr>
           <p:cNvPr id="208" name=""/>
-          <p:cNvSpPr txBox="1"/>
+          <p:cNvSpPr/>
           <p:nvPr/>
         </p:nvSpPr>
         <p:spPr>
           <a:xfrm>
             <a:off x="4983480" y="2960280"/>
-            <a:ext cx="718560" cy="296640"/>
+            <a:ext cx="718200" cy="296280"/>
           </a:xfrm>
           <a:prstGeom prst="rect">
             <a:avLst/>
@@ -11505,6 +11826,12 @@
             <a:noFill/>
           </a:ln>
         </p:spPr>
+        <p:style>
+          <a:lnRef idx="0"/>
+          <a:fillRef idx="0"/>
+          <a:effectRef idx="0"/>
+          <a:fontRef idx="minor"/>
+        </p:style>
         <p:txBody>
           <a:bodyPr lIns="90000" rIns="90000" tIns="45000" bIns="45000">
             <a:noAutofit/>
@@ -11528,6 +11855,7 @@
                   <a:srgbClr val="ff972f"/>
                 </a:solidFill>
                 <a:latin typeface="Arial"/>
+                <a:ea typeface="Noto Sans CJK SC"/>
               </a:rPr>
               <a:t>ind</a:t>
             </a:r>
@@ -11540,13 +11868,13 @@
       <p:sp>
         <p:nvSpPr>
           <p:cNvPr id="209" name=""/>
-          <p:cNvSpPr txBox="1"/>
+          <p:cNvSpPr/>
           <p:nvPr/>
         </p:nvSpPr>
         <p:spPr>
           <a:xfrm>
             <a:off x="4983840" y="4112640"/>
-            <a:ext cx="822240" cy="459000"/>
+            <a:ext cx="821880" cy="458640"/>
           </a:xfrm>
           <a:prstGeom prst="rect">
             <a:avLst/>
@@ -11556,6 +11884,12 @@
             <a:noFill/>
           </a:ln>
         </p:spPr>
+        <p:style>
+          <a:lnRef idx="0"/>
+          <a:fillRef idx="0"/>
+          <a:effectRef idx="0"/>
+          <a:fontRef idx="minor"/>
+        </p:style>
         <p:txBody>
           <a:bodyPr lIns="90000" rIns="90000" tIns="45000" bIns="45000">
             <a:noAutofit/>
@@ -11579,6 +11913,7 @@
                   <a:srgbClr val="729fcf"/>
                 </a:solidFill>
                 <a:latin typeface="Arial"/>
+                <a:ea typeface="Noto Sans CJK SC"/>
               </a:rPr>
               <a:t>org</a:t>
             </a:r>
@@ -11602,7 +11937,7 @@
         <p:spPr>
           <a:xfrm>
             <a:off x="7361280" y="1122120"/>
-            <a:ext cx="2805840" cy="3885840"/>
+            <a:ext cx="2805480" cy="3885480"/>
           </a:xfrm>
           <a:prstGeom prst="rect">
             <a:avLst/>
@@ -11621,13 +11956,13 @@
         <p:spPr>
           <a:xfrm>
             <a:off x="1497960" y="1861560"/>
-            <a:ext cx="3125880" cy="110160"/>
+            <a:ext cx="3125520" cy="109800"/>
           </a:xfrm>
           <a:custGeom>
             <a:avLst/>
             <a:gdLst/>
             <a:ahLst/>
-            <a:rect l="0" t="0" r="r" b="b"/>
+            <a:rect l="l" t="t" r="r" b="b"/>
             <a:pathLst>
               <a:path w="8684" h="675">
                 <a:moveTo>
@@ -11644,6 +11979,7 @@
               </a:path>
             </a:pathLst>
           </a:custGeom>
+          <a:noFill/>
           <a:ln w="0">
             <a:solidFill>
               <a:srgbClr val="729fcf"/>
@@ -11651,6 +11987,12 @@
             <a:tailEnd len="med" type="triangle" w="med"/>
           </a:ln>
         </p:spPr>
+        <p:style>
+          <a:lnRef idx="0"/>
+          <a:fillRef idx="0"/>
+          <a:effectRef idx="0"/>
+          <a:fontRef idx="minor"/>
+        </p:style>
       </p:sp>
       <p:sp>
         <p:nvSpPr>
@@ -11661,13 +12003,13 @@
         <p:spPr>
           <a:xfrm>
             <a:off x="4641480" y="1861560"/>
-            <a:ext cx="779040" cy="121320"/>
+            <a:ext cx="778680" cy="120960"/>
           </a:xfrm>
           <a:custGeom>
             <a:avLst/>
             <a:gdLst/>
             <a:ahLst/>
-            <a:rect l="0" t="0" r="r" b="b"/>
+            <a:rect l="l" t="t" r="r" b="b"/>
             <a:pathLst>
               <a:path w="2165" h="725">
                 <a:moveTo>
@@ -11681,6 +12023,7 @@
               </a:path>
             </a:pathLst>
           </a:custGeom>
+          <a:noFill/>
           <a:ln w="0">
             <a:solidFill>
               <a:srgbClr val="729fcf"/>
@@ -11688,76 +12031,38 @@
             <a:tailEnd len="med" type="triangle" w="med"/>
           </a:ln>
         </p:spPr>
-      </p:sp>
-      <p:sp>
-        <p:nvSpPr>
-          <p:cNvPr id="213" name=""/>
-          <p:cNvSpPr txBox="1"/>
-          <p:nvPr/>
-        </p:nvSpPr>
-        <p:spPr>
-          <a:xfrm>
-            <a:off x="5846400" y="1179360"/>
-            <a:ext cx="1747440" cy="459000"/>
-          </a:xfrm>
-          <a:prstGeom prst="rect">
-            <a:avLst/>
-          </a:prstGeom>
-          <a:noFill/>
-          <a:ln w="0">
-            <a:noFill/>
-          </a:ln>
-        </p:spPr>
-        <p:txBody>
-          <a:bodyPr lIns="90000" rIns="90000" tIns="45000" bIns="45000">
-            <a:noAutofit/>
-          </a:bodyPr>
-          <a:p>
-            <a:r>
-              <a:rPr b="1" lang="en-US" sz="1300" spc="-1" strike="noStrike" u="sng">
-                <a:uFillTx/>
-                <a:latin typeface="Arial"/>
-              </a:rPr>
-              <a:t>ggraph</a:t>
-            </a:r>
-            <a:r>
-              <a:rPr b="0" lang="en-US" sz="1300" spc="-1" strike="noStrike" u="sng">
-                <a:uFillTx/>
-                <a:latin typeface="Arial"/>
-              </a:rPr>
-              <a:t>-funktioner:</a:t>
-            </a:r>
-            <a:endParaRPr b="0" lang="en-US" sz="1300" spc="-1" strike="noStrike">
-              <a:latin typeface="Arial"/>
-            </a:endParaRPr>
-          </a:p>
-        </p:txBody>
-      </p:sp>
-      <p:sp>
-        <p:nvSpPr>
-          <p:cNvPr id="214" name=""/>
-          <p:cNvSpPr/>
-          <p:nvPr/>
-        </p:nvSpPr>
-        <p:spPr>
-          <a:xfrm>
-            <a:off x="5850000" y="1545480"/>
-            <a:ext cx="1518840" cy="343080"/>
-          </a:xfrm>
-          <a:prstGeom prst="rect">
-            <a:avLst/>
-          </a:prstGeom>
-          <a:noFill/>
-          <a:ln w="0">
-            <a:noFill/>
-          </a:ln>
-        </p:spPr>
         <p:style>
           <a:lnRef idx="0"/>
           <a:fillRef idx="0"/>
           <a:effectRef idx="0"/>
           <a:fontRef idx="minor"/>
         </p:style>
+      </p:sp>
+      <p:sp>
+        <p:nvSpPr>
+          <p:cNvPr id="213" name=""/>
+          <p:cNvSpPr/>
+          <p:nvPr/>
+        </p:nvSpPr>
+        <p:spPr>
+          <a:xfrm>
+            <a:off x="5846400" y="1179360"/>
+            <a:ext cx="1747080" cy="458640"/>
+          </a:xfrm>
+          <a:prstGeom prst="rect">
+            <a:avLst/>
+          </a:prstGeom>
+          <a:noFill/>
+          <a:ln w="0">
+            <a:noFill/>
+          </a:ln>
+        </p:spPr>
+        <p:style>
+          <a:lnRef idx="0"/>
+          <a:fillRef idx="0"/>
+          <a:effectRef idx="0"/>
+          <a:fontRef idx="minor"/>
+        </p:style>
         <p:txBody>
           <a:bodyPr lIns="90000" rIns="90000" tIns="45000" bIns="45000">
             <a:noAutofit/>
@@ -11769,11 +12074,67 @@
               </a:lnSpc>
             </a:pPr>
             <a:r>
+              <a:rPr b="1" lang="en-US" sz="1300" spc="-1" strike="noStrike" u="sng">
+                <a:uFillTx/>
+                <a:latin typeface="Arial"/>
+              </a:rPr>
+              <a:t>ggraph</a:t>
+            </a:r>
+            <a:r>
+              <a:rPr b="0" lang="en-US" sz="1300" spc="-1" strike="noStrike" u="sng">
+                <a:uFillTx/>
+                <a:latin typeface="Arial"/>
+              </a:rPr>
+              <a:t>-funktioner:</a:t>
+            </a:r>
+            <a:endParaRPr b="0" lang="en-US" sz="1300" spc="-1" strike="noStrike">
+              <a:latin typeface="Arial"/>
+            </a:endParaRPr>
+          </a:p>
+        </p:txBody>
+      </p:sp>
+      <p:sp>
+        <p:nvSpPr>
+          <p:cNvPr id="214" name=""/>
+          <p:cNvSpPr/>
+          <p:nvPr/>
+        </p:nvSpPr>
+        <p:spPr>
+          <a:xfrm>
+            <a:off x="5850000" y="1545480"/>
+            <a:ext cx="1518480" cy="342720"/>
+          </a:xfrm>
+          <a:prstGeom prst="rect">
+            <a:avLst/>
+          </a:prstGeom>
+          <a:noFill/>
+          <a:ln w="0">
+            <a:noFill/>
+          </a:ln>
+        </p:spPr>
+        <p:style>
+          <a:lnRef idx="0"/>
+          <a:fillRef idx="0"/>
+          <a:effectRef idx="0"/>
+          <a:fontRef idx="minor"/>
+        </p:style>
+        <p:txBody>
+          <a:bodyPr lIns="90000" rIns="90000" tIns="45000" bIns="45000">
+            <a:noAutofit/>
+          </a:bodyPr>
+          <a:p>
+            <a:pPr>
+              <a:lnSpc>
+                <a:spcPct val="100000"/>
+              </a:lnSpc>
+            </a:pPr>
+            <a:r>
               <a:rPr b="1" lang="en-US" sz="1500" spc="-1" strike="noStrike">
                 <a:solidFill>
                   <a:srgbClr val="808080"/>
                 </a:solidFill>
                 <a:latin typeface="Times New Roman"/>
+                <a:ea typeface="DejaVu Sans"/>
               </a:rPr>
               <a:t>ggraph(  ) + ...</a:t>
             </a:r>
@@ -11792,13 +12153,13 @@
         <p:spPr>
           <a:xfrm>
             <a:off x="5495400" y="1867320"/>
-            <a:ext cx="1103040" cy="60480"/>
+            <a:ext cx="1102680" cy="60120"/>
           </a:xfrm>
           <a:custGeom>
             <a:avLst/>
             <a:gdLst/>
             <a:ahLst/>
-            <a:rect l="0" t="0" r="r" b="b"/>
+            <a:rect l="l" t="t" r="r" b="b"/>
             <a:pathLst>
               <a:path w="3065" h="362">
                 <a:moveTo>
@@ -11812,6 +12173,7 @@
               </a:path>
             </a:pathLst>
           </a:custGeom>
+          <a:noFill/>
           <a:ln w="0">
             <a:solidFill>
               <a:srgbClr val="729fcf"/>
@@ -11819,6 +12181,12 @@
             <a:tailEnd len="med" type="triangle" w="med"/>
           </a:ln>
         </p:spPr>
+        <p:style>
+          <a:lnRef idx="0"/>
+          <a:fillRef idx="0"/>
+          <a:effectRef idx="0"/>
+          <a:fontRef idx="minor"/>
+        </p:style>
       </p:sp>
       <p:sp>
         <p:nvSpPr>
@@ -11829,13 +12197,13 @@
         <p:spPr>
           <a:xfrm>
             <a:off x="1497960" y="3273480"/>
-            <a:ext cx="2823120" cy="110160"/>
+            <a:ext cx="2822760" cy="109800"/>
           </a:xfrm>
           <a:custGeom>
             <a:avLst/>
             <a:gdLst/>
             <a:ahLst/>
-            <a:rect l="0" t="0" r="r" b="b"/>
+            <a:rect l="l" t="t" r="r" b="b"/>
             <a:pathLst>
               <a:path w="7843" h="675">
                 <a:moveTo>
@@ -11852,6 +12220,7 @@
               </a:path>
             </a:pathLst>
           </a:custGeom>
+          <a:noFill/>
           <a:ln w="0">
             <a:solidFill>
               <a:srgbClr val="ff972f"/>
@@ -11859,6 +12228,12 @@
             <a:tailEnd len="med" type="triangle" w="med"/>
           </a:ln>
         </p:spPr>
+        <p:style>
+          <a:lnRef idx="0"/>
+          <a:fillRef idx="0"/>
+          <a:effectRef idx="0"/>
+          <a:fontRef idx="minor"/>
+        </p:style>
       </p:sp>
       <p:sp>
         <p:nvSpPr>
@@ -11869,13 +12244,13 @@
         <p:spPr>
           <a:xfrm>
             <a:off x="4372920" y="3273480"/>
-            <a:ext cx="1047600" cy="121320"/>
+            <a:ext cx="1047240" cy="120960"/>
           </a:xfrm>
           <a:custGeom>
             <a:avLst/>
             <a:gdLst/>
             <a:ahLst/>
-            <a:rect l="0" t="0" r="r" b="b"/>
+            <a:rect l="l" t="t" r="r" b="b"/>
             <a:pathLst>
               <a:path w="2911" h="725">
                 <a:moveTo>
@@ -11889,6 +12264,7 @@
               </a:path>
             </a:pathLst>
           </a:custGeom>
+          <a:noFill/>
           <a:ln w="0">
             <a:solidFill>
               <a:srgbClr val="ff972f"/>
@@ -11896,6 +12272,12 @@
             <a:tailEnd len="med" type="triangle" w="med"/>
           </a:ln>
         </p:spPr>
+        <p:style>
+          <a:lnRef idx="0"/>
+          <a:fillRef idx="0"/>
+          <a:effectRef idx="0"/>
+          <a:fontRef idx="minor"/>
+        </p:style>
       </p:sp>
       <p:sp>
         <p:nvSpPr>
@@ -11906,13 +12288,13 @@
         <p:spPr>
           <a:xfrm>
             <a:off x="5495400" y="3279240"/>
-            <a:ext cx="1103040" cy="60480"/>
+            <a:ext cx="1102680" cy="60120"/>
           </a:xfrm>
           <a:custGeom>
             <a:avLst/>
             <a:gdLst/>
             <a:ahLst/>
-            <a:rect l="0" t="0" r="r" b="b"/>
+            <a:rect l="l" t="t" r="r" b="b"/>
             <a:pathLst>
               <a:path w="3065" h="362">
                 <a:moveTo>
@@ -11926,6 +12308,7 @@
               </a:path>
             </a:pathLst>
           </a:custGeom>
+          <a:noFill/>
           <a:ln w="0">
             <a:solidFill>
               <a:srgbClr val="ff972f"/>
@@ -11933,6 +12316,12 @@
             <a:tailEnd len="med" type="triangle" w="med"/>
           </a:ln>
         </p:spPr>
+        <p:style>
+          <a:lnRef idx="0"/>
+          <a:fillRef idx="0"/>
+          <a:effectRef idx="0"/>
+          <a:fontRef idx="minor"/>
+        </p:style>
       </p:sp>
       <p:sp>
         <p:nvSpPr>
@@ -11943,13 +12332,13 @@
         <p:spPr>
           <a:xfrm>
             <a:off x="1461960" y="4433400"/>
-            <a:ext cx="2945520" cy="110160"/>
+            <a:ext cx="2945160" cy="109800"/>
           </a:xfrm>
           <a:custGeom>
             <a:avLst/>
             <a:gdLst/>
             <a:ahLst/>
-            <a:rect l="0" t="0" r="r" b="b"/>
+            <a:rect l="l" t="t" r="r" b="b"/>
             <a:pathLst>
               <a:path w="8183" h="675">
                 <a:moveTo>
@@ -11966,6 +12355,7 @@
               </a:path>
             </a:pathLst>
           </a:custGeom>
+          <a:noFill/>
           <a:ln w="0">
             <a:solidFill>
               <a:srgbClr val="729fcf"/>
@@ -11973,6 +12363,12 @@
             <a:tailEnd len="med" type="triangle" w="med"/>
           </a:ln>
         </p:spPr>
+        <p:style>
+          <a:lnRef idx="0"/>
+          <a:fillRef idx="0"/>
+          <a:effectRef idx="0"/>
+          <a:fontRef idx="minor"/>
+        </p:style>
       </p:sp>
       <p:sp>
         <p:nvSpPr>
@@ -11983,13 +12379,13 @@
         <p:spPr>
           <a:xfrm>
             <a:off x="4407480" y="4433400"/>
-            <a:ext cx="977040" cy="121320"/>
+            <a:ext cx="976680" cy="120960"/>
           </a:xfrm>
           <a:custGeom>
             <a:avLst/>
             <a:gdLst/>
             <a:ahLst/>
-            <a:rect l="0" t="0" r="r" b="b"/>
+            <a:rect l="l" t="t" r="r" b="b"/>
             <a:pathLst>
               <a:path w="2715" h="725">
                 <a:moveTo>
@@ -12003,6 +12399,7 @@
               </a:path>
             </a:pathLst>
           </a:custGeom>
+          <a:noFill/>
           <a:ln w="0">
             <a:solidFill>
               <a:srgbClr val="729fcf"/>
@@ -12010,6 +12407,12 @@
             <a:tailEnd len="med" type="triangle" w="med"/>
           </a:ln>
         </p:spPr>
+        <p:style>
+          <a:lnRef idx="0"/>
+          <a:fillRef idx="0"/>
+          <a:effectRef idx="0"/>
+          <a:fontRef idx="minor"/>
+        </p:style>
       </p:sp>
       <p:sp>
         <p:nvSpPr>
@@ -12020,13 +12423,13 @@
         <p:spPr>
           <a:xfrm>
             <a:off x="5459400" y="4439160"/>
-            <a:ext cx="1103040" cy="60480"/>
+            <a:ext cx="1102680" cy="60120"/>
           </a:xfrm>
           <a:custGeom>
             <a:avLst/>
             <a:gdLst/>
             <a:ahLst/>
-            <a:rect l="0" t="0" r="r" b="b"/>
+            <a:rect l="l" t="t" r="r" b="b"/>
             <a:pathLst>
               <a:path w="3065" h="362">
                 <a:moveTo>
@@ -12040,6 +12443,7 @@
               </a:path>
             </a:pathLst>
           </a:custGeom>
+          <a:noFill/>
           <a:ln w="0">
             <a:solidFill>
               <a:srgbClr val="729fcf"/>
@@ -12047,6 +12451,12 @@
             <a:tailEnd len="med" type="triangle" w="med"/>
           </a:ln>
         </p:spPr>
+        <p:style>
+          <a:lnRef idx="0"/>
+          <a:fillRef idx="0"/>
+          <a:effectRef idx="0"/>
+          <a:fontRef idx="minor"/>
+        </p:style>
       </p:sp>
       <p:sp>
         <p:nvSpPr>
@@ -12085,13 +12495,13 @@
         <p:spPr>
           <a:xfrm>
             <a:off x="6676200" y="3290400"/>
-            <a:ext cx="736200" cy="268560"/>
+            <a:ext cx="735840" cy="268200"/>
           </a:xfrm>
           <a:custGeom>
             <a:avLst/>
             <a:gdLst/>
             <a:ahLst/>
-            <a:rect l="0" t="0" r="r" b="b"/>
+            <a:rect l="l" t="t" r="r" b="b"/>
             <a:pathLst>
               <a:path w="2094" h="771">
                 <a:moveTo>
@@ -12108,6 +12518,7 @@
               </a:path>
             </a:pathLst>
           </a:custGeom>
+          <a:noFill/>
           <a:ln w="0">
             <a:solidFill>
               <a:srgbClr val="ff972f"/>
@@ -12115,6 +12526,12 @@
             <a:tailEnd len="med" type="triangle" w="med"/>
           </a:ln>
         </p:spPr>
+        <p:style>
+          <a:lnRef idx="0"/>
+          <a:fillRef idx="0"/>
+          <a:effectRef idx="0"/>
+          <a:fontRef idx="minor"/>
+        </p:style>
       </p:sp>
       <p:sp>
         <p:nvSpPr>
@@ -12125,13 +12542,13 @@
         <p:spPr>
           <a:xfrm>
             <a:off x="6667560" y="4485600"/>
-            <a:ext cx="2485080" cy="357480"/>
+            <a:ext cx="2484720" cy="357120"/>
           </a:xfrm>
           <a:custGeom>
             <a:avLst/>
             <a:gdLst/>
             <a:ahLst/>
-            <a:rect l="0" t="0" r="r" b="b"/>
+            <a:rect l="l" t="t" r="r" b="b"/>
             <a:pathLst>
               <a:path w="6904" h="1756">
                 <a:moveTo>
@@ -12153,6 +12570,7 @@
               </a:path>
             </a:pathLst>
           </a:custGeom>
+          <a:noFill/>
           <a:ln w="0">
             <a:solidFill>
               <a:srgbClr val="729fcf"/>
@@ -12160,67 +12578,23 @@
             <a:tailEnd len="med" type="triangle" w="med"/>
           </a:ln>
         </p:spPr>
-      </p:sp>
-      <p:sp>
-        <p:nvSpPr>
-          <p:cNvPr id="225" name=""/>
-          <p:cNvSpPr/>
-          <p:nvPr/>
-        </p:nvSpPr>
-        <p:spPr>
-          <a:xfrm>
-            <a:off x="5850000" y="2949480"/>
-            <a:ext cx="1518840" cy="343080"/>
-          </a:xfrm>
-          <a:prstGeom prst="rect">
-            <a:avLst/>
-          </a:prstGeom>
-          <a:noFill/>
-          <a:ln w="0">
-            <a:noFill/>
-          </a:ln>
-        </p:spPr>
         <p:style>
           <a:lnRef idx="0"/>
           <a:fillRef idx="0"/>
           <a:effectRef idx="0"/>
           <a:fontRef idx="minor"/>
         </p:style>
-        <p:txBody>
-          <a:bodyPr lIns="90000" rIns="90000" tIns="45000" bIns="45000">
-            <a:noAutofit/>
-          </a:bodyPr>
-          <a:p>
-            <a:pPr>
-              <a:lnSpc>
-                <a:spcPct val="100000"/>
-              </a:lnSpc>
-            </a:pPr>
-            <a:r>
-              <a:rPr b="1" lang="en-US" sz="1500" spc="-1" strike="noStrike">
-                <a:solidFill>
-                  <a:srgbClr val="808080"/>
-                </a:solidFill>
-                <a:latin typeface="Times New Roman"/>
-              </a:rPr>
-              <a:t>ggraph(  ) + ...</a:t>
-            </a:r>
-            <a:endParaRPr b="0" lang="en-US" sz="1500" spc="-1" strike="noStrike">
-              <a:latin typeface="Arial"/>
-            </a:endParaRPr>
-          </a:p>
-        </p:txBody>
-      </p:sp>
-      <p:sp>
-        <p:nvSpPr>
-          <p:cNvPr id="226" name=""/>
+      </p:sp>
+      <p:sp>
+        <p:nvSpPr>
+          <p:cNvPr id="225" name=""/>
           <p:cNvSpPr/>
           <p:nvPr/>
         </p:nvSpPr>
         <p:spPr>
           <a:xfrm>
-            <a:off x="5842080" y="4129560"/>
-            <a:ext cx="1518840" cy="343080"/>
+            <a:off x="5850000" y="2949480"/>
+            <a:ext cx="1518480" cy="342720"/>
           </a:xfrm>
           <a:prstGeom prst="rect">
             <a:avLst/>
@@ -12252,6 +12626,58 @@
                   <a:srgbClr val="808080"/>
                 </a:solidFill>
                 <a:latin typeface="Times New Roman"/>
+                <a:ea typeface="DejaVu Sans"/>
+              </a:rPr>
+              <a:t>ggraph(  ) + ...</a:t>
+            </a:r>
+            <a:endParaRPr b="0" lang="en-US" sz="1500" spc="-1" strike="noStrike">
+              <a:latin typeface="Arial"/>
+            </a:endParaRPr>
+          </a:p>
+        </p:txBody>
+      </p:sp>
+      <p:sp>
+        <p:nvSpPr>
+          <p:cNvPr id="226" name=""/>
+          <p:cNvSpPr/>
+          <p:nvPr/>
+        </p:nvSpPr>
+        <p:spPr>
+          <a:xfrm>
+            <a:off x="5842080" y="4129560"/>
+            <a:ext cx="1518480" cy="342720"/>
+          </a:xfrm>
+          <a:prstGeom prst="rect">
+            <a:avLst/>
+          </a:prstGeom>
+          <a:noFill/>
+          <a:ln w="0">
+            <a:noFill/>
+          </a:ln>
+        </p:spPr>
+        <p:style>
+          <a:lnRef idx="0"/>
+          <a:fillRef idx="0"/>
+          <a:effectRef idx="0"/>
+          <a:fontRef idx="minor"/>
+        </p:style>
+        <p:txBody>
+          <a:bodyPr lIns="90000" rIns="90000" tIns="45000" bIns="45000">
+            <a:noAutofit/>
+          </a:bodyPr>
+          <a:p>
+            <a:pPr>
+              <a:lnSpc>
+                <a:spcPct val="100000"/>
+              </a:lnSpc>
+            </a:pPr>
+            <a:r>
+              <a:rPr b="1" lang="en-US" sz="1500" spc="-1" strike="noStrike">
+                <a:solidFill>
+                  <a:srgbClr val="808080"/>
+                </a:solidFill>
+                <a:latin typeface="Times New Roman"/>
+                <a:ea typeface="DejaVu Sans"/>
               </a:rPr>
               <a:t>ggraph(  ) + ...</a:t>
             </a:r>
